--- a/Docker.pptx
+++ b/Docker.pptx
@@ -26,7 +26,6 @@
     <p:sldId id="271" r:id="rId23"/>
     <p:sldId id="272" r:id="rId24"/>
     <p:sldId id="273" r:id="rId25"/>
-    <p:sldId id="274" r:id="rId26"/>
   </p:sldIdLst>
   <p:sldSz cx="24384000" cy="13716000"/>
   <p:notesSz cx="6858000" cy="9144000"/>
@@ -57,7 +56,7 @@
         <a:uFillTx/>
       </a:defRPr>
     </a:defPPr>
-    <a:lvl1pPr marL="0" marR="0" indent="0" algn="l" defTabSz="2438338" rtl="0" fontAlgn="auto" latinLnBrk="0" hangingPunct="0">
+    <a:lvl1pPr marL="0" marR="0" indent="0" algn="l" defTabSz="2438337" rtl="0" fontAlgn="auto" latinLnBrk="0" hangingPunct="0">
       <a:lnSpc>
         <a:spcPct val="90000"/>
       </a:lnSpc>
@@ -81,13 +80,13 @@
         </a:solidFill>
         <a:effectLst/>
         <a:uFillTx/>
-        <a:latin typeface="+mn-lt"/>
-        <a:ea typeface="+mn-ea"/>
-        <a:cs typeface="+mn-cs"/>
+        <a:latin typeface="+mj-lt"/>
+        <a:ea typeface="+mj-ea"/>
+        <a:cs typeface="+mj-cs"/>
         <a:sym typeface="Helvetica Neue"/>
       </a:defRPr>
     </a:lvl1pPr>
-    <a:lvl2pPr marL="0" marR="0" indent="457200" algn="l" defTabSz="2438338" rtl="0" fontAlgn="auto" latinLnBrk="0" hangingPunct="0">
+    <a:lvl2pPr marL="0" marR="0" indent="0" algn="l" defTabSz="2438337" rtl="0" fontAlgn="auto" latinLnBrk="0" hangingPunct="0">
       <a:lnSpc>
         <a:spcPct val="90000"/>
       </a:lnSpc>
@@ -111,13 +110,13 @@
         </a:solidFill>
         <a:effectLst/>
         <a:uFillTx/>
-        <a:latin typeface="+mn-lt"/>
-        <a:ea typeface="+mn-ea"/>
-        <a:cs typeface="+mn-cs"/>
+        <a:latin typeface="+mj-lt"/>
+        <a:ea typeface="+mj-ea"/>
+        <a:cs typeface="+mj-cs"/>
         <a:sym typeface="Helvetica Neue"/>
       </a:defRPr>
     </a:lvl2pPr>
-    <a:lvl3pPr marL="0" marR="0" indent="914400" algn="l" defTabSz="2438338" rtl="0" fontAlgn="auto" latinLnBrk="0" hangingPunct="0">
+    <a:lvl3pPr marL="0" marR="0" indent="0" algn="l" defTabSz="2438337" rtl="0" fontAlgn="auto" latinLnBrk="0" hangingPunct="0">
       <a:lnSpc>
         <a:spcPct val="90000"/>
       </a:lnSpc>
@@ -141,13 +140,13 @@
         </a:solidFill>
         <a:effectLst/>
         <a:uFillTx/>
-        <a:latin typeface="+mn-lt"/>
-        <a:ea typeface="+mn-ea"/>
-        <a:cs typeface="+mn-cs"/>
+        <a:latin typeface="+mj-lt"/>
+        <a:ea typeface="+mj-ea"/>
+        <a:cs typeface="+mj-cs"/>
         <a:sym typeface="Helvetica Neue"/>
       </a:defRPr>
     </a:lvl3pPr>
-    <a:lvl4pPr marL="0" marR="0" indent="1371600" algn="l" defTabSz="2438338" rtl="0" fontAlgn="auto" latinLnBrk="0" hangingPunct="0">
+    <a:lvl4pPr marL="0" marR="0" indent="0" algn="l" defTabSz="2438337" rtl="0" fontAlgn="auto" latinLnBrk="0" hangingPunct="0">
       <a:lnSpc>
         <a:spcPct val="90000"/>
       </a:lnSpc>
@@ -171,13 +170,13 @@
         </a:solidFill>
         <a:effectLst/>
         <a:uFillTx/>
-        <a:latin typeface="+mn-lt"/>
-        <a:ea typeface="+mn-ea"/>
-        <a:cs typeface="+mn-cs"/>
+        <a:latin typeface="+mj-lt"/>
+        <a:ea typeface="+mj-ea"/>
+        <a:cs typeface="+mj-cs"/>
         <a:sym typeface="Helvetica Neue"/>
       </a:defRPr>
     </a:lvl4pPr>
-    <a:lvl5pPr marL="0" marR="0" indent="1828800" algn="l" defTabSz="2438338" rtl="0" fontAlgn="auto" latinLnBrk="0" hangingPunct="0">
+    <a:lvl5pPr marL="0" marR="0" indent="0" algn="l" defTabSz="2438337" rtl="0" fontAlgn="auto" latinLnBrk="0" hangingPunct="0">
       <a:lnSpc>
         <a:spcPct val="90000"/>
       </a:lnSpc>
@@ -201,13 +200,13 @@
         </a:solidFill>
         <a:effectLst/>
         <a:uFillTx/>
-        <a:latin typeface="+mn-lt"/>
-        <a:ea typeface="+mn-ea"/>
-        <a:cs typeface="+mn-cs"/>
+        <a:latin typeface="+mj-lt"/>
+        <a:ea typeface="+mj-ea"/>
+        <a:cs typeface="+mj-cs"/>
         <a:sym typeface="Helvetica Neue"/>
       </a:defRPr>
     </a:lvl5pPr>
-    <a:lvl6pPr marL="0" marR="0" indent="2286000" algn="l" defTabSz="2438338" rtl="0" fontAlgn="auto" latinLnBrk="0" hangingPunct="0">
+    <a:lvl6pPr marL="0" marR="0" indent="0" algn="l" defTabSz="2438337" rtl="0" fontAlgn="auto" latinLnBrk="0" hangingPunct="0">
       <a:lnSpc>
         <a:spcPct val="90000"/>
       </a:lnSpc>
@@ -231,13 +230,13 @@
         </a:solidFill>
         <a:effectLst/>
         <a:uFillTx/>
-        <a:latin typeface="+mn-lt"/>
-        <a:ea typeface="+mn-ea"/>
-        <a:cs typeface="+mn-cs"/>
+        <a:latin typeface="+mj-lt"/>
+        <a:ea typeface="+mj-ea"/>
+        <a:cs typeface="+mj-cs"/>
         <a:sym typeface="Helvetica Neue"/>
       </a:defRPr>
     </a:lvl6pPr>
-    <a:lvl7pPr marL="0" marR="0" indent="2743200" algn="l" defTabSz="2438338" rtl="0" fontAlgn="auto" latinLnBrk="0" hangingPunct="0">
+    <a:lvl7pPr marL="0" marR="0" indent="0" algn="l" defTabSz="2438337" rtl="0" fontAlgn="auto" latinLnBrk="0" hangingPunct="0">
       <a:lnSpc>
         <a:spcPct val="90000"/>
       </a:lnSpc>
@@ -261,13 +260,13 @@
         </a:solidFill>
         <a:effectLst/>
         <a:uFillTx/>
-        <a:latin typeface="+mn-lt"/>
-        <a:ea typeface="+mn-ea"/>
-        <a:cs typeface="+mn-cs"/>
+        <a:latin typeface="+mj-lt"/>
+        <a:ea typeface="+mj-ea"/>
+        <a:cs typeface="+mj-cs"/>
         <a:sym typeface="Helvetica Neue"/>
       </a:defRPr>
     </a:lvl7pPr>
-    <a:lvl8pPr marL="0" marR="0" indent="3200400" algn="l" defTabSz="2438338" rtl="0" fontAlgn="auto" latinLnBrk="0" hangingPunct="0">
+    <a:lvl8pPr marL="0" marR="0" indent="0" algn="l" defTabSz="2438337" rtl="0" fontAlgn="auto" latinLnBrk="0" hangingPunct="0">
       <a:lnSpc>
         <a:spcPct val="90000"/>
       </a:lnSpc>
@@ -291,13 +290,13 @@
         </a:solidFill>
         <a:effectLst/>
         <a:uFillTx/>
-        <a:latin typeface="+mn-lt"/>
-        <a:ea typeface="+mn-ea"/>
-        <a:cs typeface="+mn-cs"/>
+        <a:latin typeface="+mj-lt"/>
+        <a:ea typeface="+mj-ea"/>
+        <a:cs typeface="+mj-cs"/>
         <a:sym typeface="Helvetica Neue"/>
       </a:defRPr>
     </a:lvl8pPr>
-    <a:lvl9pPr marL="0" marR="0" indent="3657600" algn="l" defTabSz="2438338" rtl="0" fontAlgn="auto" latinLnBrk="0" hangingPunct="0">
+    <a:lvl9pPr marL="0" marR="0" indent="0" algn="l" defTabSz="2438337" rtl="0" fontAlgn="auto" latinLnBrk="0" hangingPunct="0">
       <a:lnSpc>
         <a:spcPct val="90000"/>
       </a:lnSpc>
@@ -321,9 +320,9 @@
         </a:solidFill>
         <a:effectLst/>
         <a:uFillTx/>
-        <a:latin typeface="+mn-lt"/>
-        <a:ea typeface="+mn-ea"/>
-        <a:cs typeface="+mn-cs"/>
+        <a:latin typeface="+mj-lt"/>
+        <a:ea typeface="+mj-ea"/>
+        <a:cs typeface="+mj-cs"/>
         <a:sym typeface="Helvetica Neue"/>
       </a:defRPr>
     </a:lvl9pPr>
@@ -411,9 +410,9 @@
         <a:spcPct val="117999"/>
       </a:lnSpc>
       <a:defRPr sz="2200">
-        <a:latin typeface="+mn-lt"/>
-        <a:ea typeface="+mn-ea"/>
-        <a:cs typeface="+mn-cs"/>
+        <a:latin typeface="+mj-lt"/>
+        <a:ea typeface="+mj-ea"/>
+        <a:cs typeface="+mj-cs"/>
         <a:sym typeface="Helvetica Neue"/>
       </a:defRPr>
     </a:lvl1pPr>
@@ -422,9 +421,9 @@
         <a:spcPct val="117999"/>
       </a:lnSpc>
       <a:defRPr sz="2200">
-        <a:latin typeface="+mn-lt"/>
-        <a:ea typeface="+mn-ea"/>
-        <a:cs typeface="+mn-cs"/>
+        <a:latin typeface="+mj-lt"/>
+        <a:ea typeface="+mj-ea"/>
+        <a:cs typeface="+mj-cs"/>
         <a:sym typeface="Helvetica Neue"/>
       </a:defRPr>
     </a:lvl2pPr>
@@ -433,9 +432,9 @@
         <a:spcPct val="117999"/>
       </a:lnSpc>
       <a:defRPr sz="2200">
-        <a:latin typeface="+mn-lt"/>
-        <a:ea typeface="+mn-ea"/>
-        <a:cs typeface="+mn-cs"/>
+        <a:latin typeface="+mj-lt"/>
+        <a:ea typeface="+mj-ea"/>
+        <a:cs typeface="+mj-cs"/>
         <a:sym typeface="Helvetica Neue"/>
       </a:defRPr>
     </a:lvl3pPr>
@@ -444,9 +443,9 @@
         <a:spcPct val="117999"/>
       </a:lnSpc>
       <a:defRPr sz="2200">
-        <a:latin typeface="+mn-lt"/>
-        <a:ea typeface="+mn-ea"/>
-        <a:cs typeface="+mn-cs"/>
+        <a:latin typeface="+mj-lt"/>
+        <a:ea typeface="+mj-ea"/>
+        <a:cs typeface="+mj-cs"/>
         <a:sym typeface="Helvetica Neue"/>
       </a:defRPr>
     </a:lvl4pPr>
@@ -455,9 +454,9 @@
         <a:spcPct val="117999"/>
       </a:lnSpc>
       <a:defRPr sz="2200">
-        <a:latin typeface="+mn-lt"/>
-        <a:ea typeface="+mn-ea"/>
-        <a:cs typeface="+mn-cs"/>
+        <a:latin typeface="+mj-lt"/>
+        <a:ea typeface="+mj-ea"/>
+        <a:cs typeface="+mj-cs"/>
         <a:sym typeface="Helvetica Neue"/>
       </a:defRPr>
     </a:lvl5pPr>
@@ -466,9 +465,9 @@
         <a:spcPct val="117999"/>
       </a:lnSpc>
       <a:defRPr sz="2200">
-        <a:latin typeface="+mn-lt"/>
-        <a:ea typeface="+mn-ea"/>
-        <a:cs typeface="+mn-cs"/>
+        <a:latin typeface="+mj-lt"/>
+        <a:ea typeface="+mj-ea"/>
+        <a:cs typeface="+mj-cs"/>
         <a:sym typeface="Helvetica Neue"/>
       </a:defRPr>
     </a:lvl6pPr>
@@ -477,9 +476,9 @@
         <a:spcPct val="117999"/>
       </a:lnSpc>
       <a:defRPr sz="2200">
-        <a:latin typeface="+mn-lt"/>
-        <a:ea typeface="+mn-ea"/>
-        <a:cs typeface="+mn-cs"/>
+        <a:latin typeface="+mj-lt"/>
+        <a:ea typeface="+mj-ea"/>
+        <a:cs typeface="+mj-cs"/>
         <a:sym typeface="Helvetica Neue"/>
       </a:defRPr>
     </a:lvl7pPr>
@@ -488,9 +487,9 @@
         <a:spcPct val="117999"/>
       </a:lnSpc>
       <a:defRPr sz="2200">
-        <a:latin typeface="+mn-lt"/>
-        <a:ea typeface="+mn-ea"/>
-        <a:cs typeface="+mn-cs"/>
+        <a:latin typeface="+mj-lt"/>
+        <a:ea typeface="+mj-ea"/>
+        <a:cs typeface="+mj-cs"/>
         <a:sym typeface="Helvetica Neue"/>
       </a:defRPr>
     </a:lvl8pPr>
@@ -499,9 +498,9 @@
         <a:spcPct val="117999"/>
       </a:lnSpc>
       <a:defRPr sz="2200">
-        <a:latin typeface="+mn-lt"/>
-        <a:ea typeface="+mn-ea"/>
-        <a:cs typeface="+mn-cs"/>
+        <a:latin typeface="+mj-lt"/>
+        <a:ea typeface="+mj-ea"/>
+        <a:cs typeface="+mj-cs"/>
         <a:sym typeface="Helvetica Neue"/>
       </a:defRPr>
     </a:lvl9pPr>
@@ -510,7 +509,7 @@
 </file>
 
 <file path=ppt/slideLayouts/slideLayout1.xml><?xml version="1.0" encoding="utf-8"?>
-<p:sldLayout xmlns:a="http://schemas.openxmlformats.org/drawingml/2006/main" xmlns:r="http://schemas.openxmlformats.org/officeDocument/2006/relationships" xmlns:p="http://schemas.openxmlformats.org/presentationml/2006/main" xmlns:m="http://schemas.openxmlformats.org/officeDocument/2006/math" xmlns:a14="http://schemas.microsoft.com/office/drawing/2010/main" type="title" showMasterSp="1" showMasterPhAnim="1">
+<p:sldLayout xmlns:a="http://schemas.openxmlformats.org/drawingml/2006/main" xmlns:r="http://schemas.openxmlformats.org/officeDocument/2006/relationships" xmlns:p="http://schemas.openxmlformats.org/presentationml/2006/main" xmlns:m="http://schemas.openxmlformats.org/officeDocument/2006/math" xmlns:a14="http://schemas.microsoft.com/office/drawing/2010/main" type="tx" showMasterSp="1" showMasterPhAnim="1">
   <p:cSld name="Заголовок">
     <p:spTree>
       <p:nvGrpSpPr>
@@ -528,23 +527,23 @@
       </p:grpSpPr>
       <p:sp>
         <p:nvSpPr>
-          <p:cNvPr id="11" name="Автор и дата"/>
-          <p:cNvSpPr txBox="1"/>
-          <p:nvPr>
-            <p:ph type="body" sz="quarter" idx="21" hasCustomPrompt="1"/>
+          <p:cNvPr id="11" name="Уровень текста 1…"/>
+          <p:cNvSpPr txBox="1"/>
+          <p:nvPr>
+            <p:ph type="body" sz="quarter" idx="1" hasCustomPrompt="1"/>
           </p:nvPr>
         </p:nvSpPr>
         <p:spPr>
           <a:xfrm>
             <a:off x="1201340" y="11859862"/>
-            <a:ext cx="21971003" cy="636979"/>
+            <a:ext cx="21971004" cy="636980"/>
           </a:xfrm>
           <a:prstGeom prst="rect">
             <a:avLst/>
           </a:prstGeom>
         </p:spPr>
         <p:txBody>
-          <a:bodyPr lIns="45719" tIns="45719" rIns="45719" bIns="45719"/>
+          <a:bodyPr lIns="45718" tIns="45718" rIns="45718" bIns="45718" numCol="1" spcCol="38100"/>
           <a:lstStyle>
             <a:lvl1pPr marL="0" indent="0" defTabSz="825500">
               <a:lnSpc>
@@ -557,11 +556,71 @@
               <a:buNone/>
               <a:defRPr b="1" sz="3600"/>
             </a:lvl1pPr>
+            <a:lvl2pPr marL="1066800" indent="-457200" defTabSz="825500">
+              <a:lnSpc>
+                <a:spcPct val="100000"/>
+              </a:lnSpc>
+              <a:spcBef>
+                <a:spcPts val="0"/>
+              </a:spcBef>
+              <a:defRPr b="1" sz="3600"/>
+            </a:lvl2pPr>
+            <a:lvl3pPr marL="1676400" indent="-457200" defTabSz="825500">
+              <a:lnSpc>
+                <a:spcPct val="100000"/>
+              </a:lnSpc>
+              <a:spcBef>
+                <a:spcPts val="0"/>
+              </a:spcBef>
+              <a:defRPr b="1" sz="3600"/>
+            </a:lvl3pPr>
+            <a:lvl4pPr marL="2286000" indent="-457200" defTabSz="825500">
+              <a:lnSpc>
+                <a:spcPct val="100000"/>
+              </a:lnSpc>
+              <a:spcBef>
+                <a:spcPts val="0"/>
+              </a:spcBef>
+              <a:defRPr b="1" sz="3600"/>
+            </a:lvl4pPr>
+            <a:lvl5pPr marL="2895600" indent="-457200" defTabSz="825500">
+              <a:lnSpc>
+                <a:spcPct val="100000"/>
+              </a:lnSpc>
+              <a:spcBef>
+                <a:spcPts val="0"/>
+              </a:spcBef>
+              <a:defRPr b="1" sz="3600"/>
+            </a:lvl5pPr>
           </a:lstStyle>
           <a:p>
             <a:pPr/>
             <a:r>
               <a:t>Автор и дата</a:t>
+            </a:r>
+          </a:p>
+          <a:p>
+            <a:pPr lvl="1"/>
+            <a:r>
+              <a:t/>
+            </a:r>
+          </a:p>
+          <a:p>
+            <a:pPr lvl="2"/>
+            <a:r>
+              <a:t/>
+            </a:r>
+          </a:p>
+          <a:p>
+            <a:pPr lvl="3"/>
+            <a:r>
+              <a:t/>
+            </a:r>
+          </a:p>
+          <a:p>
+            <a:pPr lvl="4"/>
+            <a:r>
+              <a:t/>
             </a:r>
           </a:p>
         </p:txBody>
@@ -577,7 +636,7 @@
         <p:spPr>
           <a:xfrm>
             <a:off x="1206496" y="2574991"/>
-            <a:ext cx="21971004" cy="4648201"/>
+            <a:ext cx="21971005" cy="4648202"/>
           </a:xfrm>
           <a:prstGeom prst="rect">
             <a:avLst/>
@@ -603,20 +662,20 @@
           <p:cNvPr id="13" name="Уровень текста 1…"/>
           <p:cNvSpPr txBox="1"/>
           <p:nvPr>
-            <p:ph type="body" sz="quarter" idx="1" hasCustomPrompt="1"/>
+            <p:ph type="body" sz="quarter" idx="21" hasCustomPrompt="1"/>
           </p:nvPr>
         </p:nvSpPr>
         <p:spPr>
           <a:xfrm>
             <a:off x="1201342" y="7223190"/>
-            <a:ext cx="21971001" cy="1905001"/>
+            <a:ext cx="21971002" cy="1905002"/>
           </a:xfrm>
           <a:prstGeom prst="rect">
             <a:avLst/>
           </a:prstGeom>
         </p:spPr>
         <p:txBody>
-          <a:bodyPr/>
+          <a:bodyPr numCol="1" spcCol="38100"/>
           <a:lstStyle>
             <a:lvl1pPr marL="0" indent="0" defTabSz="825500">
               <a:lnSpc>
@@ -629,79 +688,11 @@
               <a:buNone/>
               <a:defRPr b="1" sz="5500"/>
             </a:lvl1pPr>
-            <a:lvl2pPr marL="0" indent="457200" defTabSz="825500">
-              <a:lnSpc>
-                <a:spcPct val="100000"/>
-              </a:lnSpc>
-              <a:spcBef>
-                <a:spcPts val="0"/>
-              </a:spcBef>
-              <a:buSzTx/>
-              <a:buNone/>
-              <a:defRPr b="1" sz="5500"/>
-            </a:lvl2pPr>
-            <a:lvl3pPr marL="0" indent="914400" defTabSz="825500">
-              <a:lnSpc>
-                <a:spcPct val="100000"/>
-              </a:lnSpc>
-              <a:spcBef>
-                <a:spcPts val="0"/>
-              </a:spcBef>
-              <a:buSzTx/>
-              <a:buNone/>
-              <a:defRPr b="1" sz="5500"/>
-            </a:lvl3pPr>
-            <a:lvl4pPr marL="0" indent="1371600" defTabSz="825500">
-              <a:lnSpc>
-                <a:spcPct val="100000"/>
-              </a:lnSpc>
-              <a:spcBef>
-                <a:spcPts val="0"/>
-              </a:spcBef>
-              <a:buSzTx/>
-              <a:buNone/>
-              <a:defRPr b="1" sz="5500"/>
-            </a:lvl4pPr>
-            <a:lvl5pPr marL="0" indent="1828800" defTabSz="825500">
-              <a:lnSpc>
-                <a:spcPct val="100000"/>
-              </a:lnSpc>
-              <a:spcBef>
-                <a:spcPts val="0"/>
-              </a:spcBef>
-              <a:buSzTx/>
-              <a:buNone/>
-              <a:defRPr b="1" sz="5500"/>
-            </a:lvl5pPr>
           </a:lstStyle>
           <a:p>
             <a:pPr/>
             <a:r>
               <a:t>Подзаголовок презентации</a:t>
-            </a:r>
-          </a:p>
-          <a:p>
-            <a:pPr lvl="1"/>
-            <a:r>
-              <a:t/>
-            </a:r>
-          </a:p>
-          <a:p>
-            <a:pPr lvl="2"/>
-            <a:r>
-              <a:t/>
-            </a:r>
-          </a:p>
-          <a:p>
-            <a:pPr lvl="3"/>
-            <a:r>
-              <a:t/>
-            </a:r>
-          </a:p>
-          <a:p>
-            <a:pPr lvl="4"/>
-            <a:r>
-              <a:t/>
             </a:r>
           </a:p>
         </p:txBody>
@@ -765,7 +756,7 @@
         <p:spPr>
           <a:xfrm>
             <a:off x="1206500" y="1079500"/>
-            <a:ext cx="21971000" cy="1434949"/>
+            <a:ext cx="21971000" cy="1434950"/>
           </a:xfrm>
           <a:prstGeom prst="rect">
             <a:avLst/>
@@ -784,23 +775,23 @@
       </p:sp>
       <p:sp>
         <p:nvSpPr>
-          <p:cNvPr id="100" name="Подзаголовок слайда"/>
-          <p:cNvSpPr txBox="1"/>
-          <p:nvPr>
-            <p:ph type="body" sz="quarter" idx="21" hasCustomPrompt="1"/>
+          <p:cNvPr id="100" name="Уровень текста 1…"/>
+          <p:cNvSpPr txBox="1"/>
+          <p:nvPr>
+            <p:ph type="body" sz="quarter" idx="1" hasCustomPrompt="1"/>
           </p:nvPr>
         </p:nvSpPr>
         <p:spPr>
           <a:xfrm>
-            <a:off x="1206500" y="2372962"/>
-            <a:ext cx="21971000" cy="934780"/>
+            <a:off x="1206500" y="2372961"/>
+            <a:ext cx="21971000" cy="934781"/>
           </a:xfrm>
           <a:prstGeom prst="rect">
             <a:avLst/>
           </a:prstGeom>
         </p:spPr>
         <p:txBody>
-          <a:bodyPr lIns="45719" tIns="45719" rIns="45719" bIns="45719"/>
+          <a:bodyPr lIns="45718" tIns="45718" rIns="45718" bIns="45718" numCol="1" spcCol="38100"/>
           <a:lstStyle>
             <a:lvl1pPr marL="0" indent="0" defTabSz="825500">
               <a:lnSpc>
@@ -813,11 +804,71 @@
               <a:buNone/>
               <a:defRPr b="1" sz="5500"/>
             </a:lvl1pPr>
+            <a:lvl2pPr marL="1308100" indent="-698500" defTabSz="825500">
+              <a:lnSpc>
+                <a:spcPct val="100000"/>
+              </a:lnSpc>
+              <a:spcBef>
+                <a:spcPts val="0"/>
+              </a:spcBef>
+              <a:defRPr b="1" sz="5500"/>
+            </a:lvl2pPr>
+            <a:lvl3pPr marL="1917700" indent="-698500" defTabSz="825500">
+              <a:lnSpc>
+                <a:spcPct val="100000"/>
+              </a:lnSpc>
+              <a:spcBef>
+                <a:spcPts val="0"/>
+              </a:spcBef>
+              <a:defRPr b="1" sz="5500"/>
+            </a:lvl3pPr>
+            <a:lvl4pPr marL="2527300" indent="-698500" defTabSz="825500">
+              <a:lnSpc>
+                <a:spcPct val="100000"/>
+              </a:lnSpc>
+              <a:spcBef>
+                <a:spcPts val="0"/>
+              </a:spcBef>
+              <a:defRPr b="1" sz="5500"/>
+            </a:lvl4pPr>
+            <a:lvl5pPr marL="3136900" indent="-698500" defTabSz="825500">
+              <a:lnSpc>
+                <a:spcPct val="100000"/>
+              </a:lnSpc>
+              <a:spcBef>
+                <a:spcPts val="0"/>
+              </a:spcBef>
+              <a:defRPr b="1" sz="5500"/>
+            </a:lvl5pPr>
           </a:lstStyle>
           <a:p>
             <a:pPr/>
             <a:r>
               <a:t>Подзаголовок слайда</a:t>
+            </a:r>
+          </a:p>
+          <a:p>
+            <a:pPr lvl="1"/>
+            <a:r>
+              <a:t/>
+            </a:r>
+          </a:p>
+          <a:p>
+            <a:pPr lvl="2"/>
+            <a:r>
+              <a:t/>
+            </a:r>
+          </a:p>
+          <a:p>
+            <a:pPr lvl="3"/>
+            <a:r>
+              <a:t/>
+            </a:r>
+          </a:p>
+          <a:p>
+            <a:pPr lvl="4"/>
+            <a:r>
+              <a:t/>
             </a:r>
           </a:p>
         </p:txBody>
@@ -900,23 +951,23 @@
       </p:sp>
       <p:sp>
         <p:nvSpPr>
-          <p:cNvPr id="109" name="Подзаголовок повестки дня"/>
-          <p:cNvSpPr txBox="1"/>
-          <p:nvPr>
-            <p:ph type="body" sz="quarter" idx="21" hasCustomPrompt="1"/>
+          <p:cNvPr id="109" name="Уровень текста 1…"/>
+          <p:cNvSpPr txBox="1"/>
+          <p:nvPr>
+            <p:ph type="body" sz="quarter" idx="1" hasCustomPrompt="1"/>
           </p:nvPr>
         </p:nvSpPr>
         <p:spPr>
           <a:xfrm>
-            <a:off x="1206500" y="2372962"/>
-            <a:ext cx="21971000" cy="934780"/>
+            <a:off x="1206500" y="2372961"/>
+            <a:ext cx="21971000" cy="934781"/>
           </a:xfrm>
           <a:prstGeom prst="rect">
             <a:avLst/>
           </a:prstGeom>
         </p:spPr>
         <p:txBody>
-          <a:bodyPr lIns="45719" tIns="45719" rIns="45719" bIns="45719"/>
+          <a:bodyPr lIns="45718" tIns="45718" rIns="45718" bIns="45718" numCol="1" spcCol="38100"/>
           <a:lstStyle>
             <a:lvl1pPr marL="0" indent="0" defTabSz="825500">
               <a:lnSpc>
@@ -929,6 +980,42 @@
               <a:buNone/>
               <a:defRPr b="1" sz="5500"/>
             </a:lvl1pPr>
+            <a:lvl2pPr marL="1308100" indent="-698500" defTabSz="825500">
+              <a:lnSpc>
+                <a:spcPct val="100000"/>
+              </a:lnSpc>
+              <a:spcBef>
+                <a:spcPts val="0"/>
+              </a:spcBef>
+              <a:defRPr b="1" sz="5500"/>
+            </a:lvl2pPr>
+            <a:lvl3pPr marL="1917700" indent="-698500" defTabSz="825500">
+              <a:lnSpc>
+                <a:spcPct val="100000"/>
+              </a:lnSpc>
+              <a:spcBef>
+                <a:spcPts val="0"/>
+              </a:spcBef>
+              <a:defRPr b="1" sz="5500"/>
+            </a:lvl3pPr>
+            <a:lvl4pPr marL="2527300" indent="-698500" defTabSz="825500">
+              <a:lnSpc>
+                <a:spcPct val="100000"/>
+              </a:lnSpc>
+              <a:spcBef>
+                <a:spcPts val="0"/>
+              </a:spcBef>
+              <a:defRPr b="1" sz="5500"/>
+            </a:lvl4pPr>
+            <a:lvl5pPr marL="3136900" indent="-698500" defTabSz="825500">
+              <a:lnSpc>
+                <a:spcPct val="100000"/>
+              </a:lnSpc>
+              <a:spcBef>
+                <a:spcPts val="0"/>
+              </a:spcBef>
+              <a:defRPr b="1" sz="5500"/>
+            </a:lvl5pPr>
           </a:lstStyle>
           <a:p>
             <a:pPr/>
@@ -936,6 +1023,30 @@
               <a:t>Подзаголовок повестки дня</a:t>
             </a:r>
           </a:p>
+          <a:p>
+            <a:pPr lvl="1"/>
+            <a:r>
+              <a:t/>
+            </a:r>
+          </a:p>
+          <a:p>
+            <a:pPr lvl="2"/>
+            <a:r>
+              <a:t/>
+            </a:r>
+          </a:p>
+          <a:p>
+            <a:pPr lvl="3"/>
+            <a:r>
+              <a:t/>
+            </a:r>
+          </a:p>
+          <a:p>
+            <a:pPr lvl="4"/>
+            <a:r>
+              <a:t/>
+            </a:r>
+          </a:p>
         </p:txBody>
       </p:sp>
       <p:sp>
@@ -943,16 +1054,16 @@
           <p:cNvPr id="110" name="Уровень текста 1…"/>
           <p:cNvSpPr txBox="1"/>
           <p:nvPr>
-            <p:ph type="body" idx="1" hasCustomPrompt="1"/>
-          </p:nvPr>
-        </p:nvSpPr>
-        <p:spPr>
-          <a:prstGeom prst="rect">
-            <a:avLst/>
-          </a:prstGeom>
-        </p:spPr>
-        <p:txBody>
-          <a:bodyPr/>
+            <p:ph type="body" idx="21" hasCustomPrompt="1"/>
+          </p:nvPr>
+        </p:nvSpPr>
+        <p:spPr>
+          <a:prstGeom prst="rect">
+            <a:avLst/>
+          </a:prstGeom>
+        </p:spPr>
+        <p:txBody>
+          <a:bodyPr numCol="1" spcCol="38100"/>
           <a:lstStyle>
             <a:lvl1pPr marL="0" indent="0" defTabSz="825500">
               <a:lnSpc>
@@ -963,81 +1074,13 @@
               </a:spcBef>
               <a:buSzTx/>
               <a:buNone/>
-              <a:defRPr spc="-55" sz="5500"/>
+              <a:defRPr spc="-99" sz="5500"/>
             </a:lvl1pPr>
-            <a:lvl2pPr marL="0" indent="457200" defTabSz="825500">
-              <a:lnSpc>
-                <a:spcPct val="100000"/>
-              </a:lnSpc>
-              <a:spcBef>
-                <a:spcPts val="1800"/>
-              </a:spcBef>
-              <a:buSzTx/>
-              <a:buNone/>
-              <a:defRPr spc="-55" sz="5500"/>
-            </a:lvl2pPr>
-            <a:lvl3pPr marL="0" indent="914400" defTabSz="825500">
-              <a:lnSpc>
-                <a:spcPct val="100000"/>
-              </a:lnSpc>
-              <a:spcBef>
-                <a:spcPts val="1800"/>
-              </a:spcBef>
-              <a:buSzTx/>
-              <a:buNone/>
-              <a:defRPr spc="-55" sz="5500"/>
-            </a:lvl3pPr>
-            <a:lvl4pPr marL="0" indent="1371600" defTabSz="825500">
-              <a:lnSpc>
-                <a:spcPct val="100000"/>
-              </a:lnSpc>
-              <a:spcBef>
-                <a:spcPts val="1800"/>
-              </a:spcBef>
-              <a:buSzTx/>
-              <a:buNone/>
-              <a:defRPr spc="-55" sz="5500"/>
-            </a:lvl4pPr>
-            <a:lvl5pPr marL="0" indent="1828800" defTabSz="825500">
-              <a:lnSpc>
-                <a:spcPct val="100000"/>
-              </a:lnSpc>
-              <a:spcBef>
-                <a:spcPts val="1800"/>
-              </a:spcBef>
-              <a:buSzTx/>
-              <a:buNone/>
-              <a:defRPr spc="-55" sz="5500"/>
-            </a:lvl5pPr>
           </a:lstStyle>
           <a:p>
             <a:pPr/>
             <a:r>
               <a:t>Темы повестки дня</a:t>
-            </a:r>
-          </a:p>
-          <a:p>
-            <a:pPr lvl="1"/>
-            <a:r>
-              <a:t/>
-            </a:r>
-          </a:p>
-          <a:p>
-            <a:pPr lvl="2"/>
-            <a:r>
-              <a:t/>
-            </a:r>
-          </a:p>
-          <a:p>
-            <a:pPr lvl="3"/>
-            <a:r>
-              <a:t/>
-            </a:r>
-          </a:p>
-          <a:p>
-            <a:pPr lvl="4"/>
-            <a:r>
-              <a:t/>
             </a:r>
           </a:p>
         </p:txBody>
@@ -1108,7 +1151,7 @@
           </a:prstGeom>
         </p:spPr>
         <p:txBody>
-          <a:bodyPr anchor="ctr"/>
+          <a:bodyPr numCol="1" spcCol="38100" anchor="ctr"/>
           <a:lstStyle>
             <a:lvl1pPr marL="0" indent="0" algn="ctr">
               <a:lnSpc>
@@ -1126,7 +1169,7 @@
                 <a:sym typeface="Helvetica Neue Medium"/>
               </a:defRPr>
             </a:lvl1pPr>
-            <a:lvl2pPr marL="0" indent="457200" algn="ctr">
+            <a:lvl2pPr marL="0" indent="0" algn="ctr">
               <a:lnSpc>
                 <a:spcPct val="80000"/>
               </a:lnSpc>
@@ -1142,7 +1185,7 @@
                 <a:sym typeface="Helvetica Neue Medium"/>
               </a:defRPr>
             </a:lvl2pPr>
-            <a:lvl3pPr marL="0" indent="914400" algn="ctr">
+            <a:lvl3pPr marL="0" indent="0" algn="ctr">
               <a:lnSpc>
                 <a:spcPct val="80000"/>
               </a:lnSpc>
@@ -1158,7 +1201,7 @@
                 <a:sym typeface="Helvetica Neue Medium"/>
               </a:defRPr>
             </a:lvl3pPr>
-            <a:lvl4pPr marL="0" indent="1371600" algn="ctr">
+            <a:lvl4pPr marL="0" indent="0" algn="ctr">
               <a:lnSpc>
                 <a:spcPct val="80000"/>
               </a:lnSpc>
@@ -1174,7 +1217,7 @@
                 <a:sym typeface="Helvetica Neue Medium"/>
               </a:defRPr>
             </a:lvl4pPr>
-            <a:lvl5pPr marL="0" indent="1828800" algn="ctr">
+            <a:lvl5pPr marL="0" indent="0" algn="ctr">
               <a:lnSpc>
                 <a:spcPct val="80000"/>
               </a:lnSpc>
@@ -1281,15 +1324,15 @@
         </p:nvSpPr>
         <p:spPr>
           <a:xfrm>
-            <a:off x="1206500" y="1075927"/>
-            <a:ext cx="21971000" cy="7241584"/>
+            <a:off x="1206500" y="1075926"/>
+            <a:ext cx="21971000" cy="7241586"/>
           </a:xfrm>
           <a:prstGeom prst="rect">
             <a:avLst/>
           </a:prstGeom>
         </p:spPr>
         <p:txBody>
-          <a:bodyPr anchor="b"/>
+          <a:bodyPr numCol="1" spcCol="38100" anchor="b"/>
           <a:lstStyle>
             <a:lvl1pPr marL="0" indent="0" algn="ctr">
               <a:lnSpc>
@@ -1302,7 +1345,7 @@
               <a:buNone/>
               <a:defRPr b="1" spc="-250" sz="25000"/>
             </a:lvl1pPr>
-            <a:lvl2pPr marL="0" indent="457200" algn="ctr">
+            <a:lvl2pPr marL="0" indent="0" algn="ctr">
               <a:lnSpc>
                 <a:spcPct val="80000"/>
               </a:lnSpc>
@@ -1313,7 +1356,7 @@
               <a:buNone/>
               <a:defRPr b="1" spc="-250" sz="25000"/>
             </a:lvl2pPr>
-            <a:lvl3pPr marL="0" indent="914400" algn="ctr">
+            <a:lvl3pPr marL="0" indent="0" algn="ctr">
               <a:lnSpc>
                 <a:spcPct val="80000"/>
               </a:lnSpc>
@@ -1324,7 +1367,7 @@
               <a:buNone/>
               <a:defRPr b="1" spc="-250" sz="25000"/>
             </a:lvl3pPr>
-            <a:lvl4pPr marL="0" indent="1371600" algn="ctr">
+            <a:lvl4pPr marL="0" indent="0" algn="ctr">
               <a:lnSpc>
                 <a:spcPct val="80000"/>
               </a:lnSpc>
@@ -1335,7 +1378,7 @@
               <a:buNone/>
               <a:defRPr b="1" spc="-250" sz="25000"/>
             </a:lvl4pPr>
-            <a:lvl5pPr marL="0" indent="1828800" algn="ctr">
+            <a:lvl5pPr marL="0" indent="0" algn="ctr">
               <a:lnSpc>
                 <a:spcPct val="80000"/>
               </a:lnSpc>
@@ -1397,7 +1440,7 @@
           </a:prstGeom>
         </p:spPr>
         <p:txBody>
-          <a:bodyPr lIns="45719" tIns="45719" rIns="45719" bIns="45719"/>
+          <a:bodyPr lIns="45718" tIns="45718" rIns="45718" bIns="45718" numCol="1" spcCol="38100"/>
           <a:lstStyle>
             <a:lvl1pPr marL="0" indent="0" algn="ctr" defTabSz="825500">
               <a:lnSpc>
@@ -1469,23 +1512,23 @@
       </p:grpSpPr>
       <p:sp>
         <p:nvSpPr>
-          <p:cNvPr id="135" name="Авторство"/>
-          <p:cNvSpPr txBox="1"/>
-          <p:nvPr>
-            <p:ph type="body" sz="quarter" idx="21" hasCustomPrompt="1"/>
+          <p:cNvPr id="135" name="Уровень текста 1…"/>
+          <p:cNvSpPr txBox="1"/>
+          <p:nvPr>
+            <p:ph type="body" sz="quarter" idx="1" hasCustomPrompt="1"/>
           </p:nvPr>
         </p:nvSpPr>
         <p:spPr>
           <a:xfrm>
-            <a:off x="2430025" y="10675453"/>
-            <a:ext cx="20200052" cy="636979"/>
+            <a:off x="2430024" y="10675453"/>
+            <a:ext cx="20200054" cy="636980"/>
           </a:xfrm>
           <a:prstGeom prst="rect">
             <a:avLst/>
           </a:prstGeom>
         </p:spPr>
         <p:txBody>
-          <a:bodyPr lIns="45719" tIns="45719" rIns="45719" bIns="45719"/>
+          <a:bodyPr lIns="45718" tIns="45718" rIns="45718" bIns="45718" numCol="1" spcCol="38100"/>
           <a:lstStyle>
             <a:lvl1pPr marL="0" indent="0" defTabSz="825500">
               <a:lnSpc>
@@ -1498,6 +1541,42 @@
               <a:buNone/>
               <a:defRPr b="1" sz="3600"/>
             </a:lvl1pPr>
+            <a:lvl2pPr marL="1066800" indent="-457200" defTabSz="825500">
+              <a:lnSpc>
+                <a:spcPct val="100000"/>
+              </a:lnSpc>
+              <a:spcBef>
+                <a:spcPts val="0"/>
+              </a:spcBef>
+              <a:defRPr b="1" sz="3600"/>
+            </a:lvl2pPr>
+            <a:lvl3pPr marL="1676400" indent="-457200" defTabSz="825500">
+              <a:lnSpc>
+                <a:spcPct val="100000"/>
+              </a:lnSpc>
+              <a:spcBef>
+                <a:spcPts val="0"/>
+              </a:spcBef>
+              <a:defRPr b="1" sz="3600"/>
+            </a:lvl3pPr>
+            <a:lvl4pPr marL="2286000" indent="-457200" defTabSz="825500">
+              <a:lnSpc>
+                <a:spcPct val="100000"/>
+              </a:lnSpc>
+              <a:spcBef>
+                <a:spcPts val="0"/>
+              </a:spcBef>
+              <a:defRPr b="1" sz="3600"/>
+            </a:lvl4pPr>
+            <a:lvl5pPr marL="2895600" indent="-457200" defTabSz="825500">
+              <a:lnSpc>
+                <a:spcPct val="100000"/>
+              </a:lnSpc>
+              <a:spcBef>
+                <a:spcPts val="0"/>
+              </a:spcBef>
+              <a:defRPr b="1" sz="3600"/>
+            </a:lvl5pPr>
           </a:lstStyle>
           <a:p>
             <a:pPr/>
@@ -1505,6 +1584,30 @@
               <a:t>Авторство</a:t>
             </a:r>
           </a:p>
+          <a:p>
+            <a:pPr lvl="1"/>
+            <a:r>
+              <a:t/>
+            </a:r>
+          </a:p>
+          <a:p>
+            <a:pPr lvl="2"/>
+            <a:r>
+              <a:t/>
+            </a:r>
+          </a:p>
+          <a:p>
+            <a:pPr lvl="3"/>
+            <a:r>
+              <a:t/>
+            </a:r>
+          </a:p>
+          <a:p>
+            <a:pPr lvl="4"/>
+            <a:r>
+              <a:t/>
+            </a:r>
+          </a:p>
         </p:txBody>
       </p:sp>
       <p:sp>
@@ -1512,115 +1615,39 @@
           <p:cNvPr id="136" name="Уровень текста 1…"/>
           <p:cNvSpPr txBox="1"/>
           <p:nvPr>
-            <p:ph type="body" sz="half" idx="1" hasCustomPrompt="1"/>
+            <p:ph type="body" sz="half" idx="21" hasCustomPrompt="1"/>
           </p:nvPr>
         </p:nvSpPr>
         <p:spPr>
           <a:xfrm>
             <a:off x="1753923" y="4939860"/>
-            <a:ext cx="20876154" cy="3836280"/>
+            <a:ext cx="20876154" cy="3836281"/>
           </a:xfrm>
           <a:prstGeom prst="rect">
             <a:avLst/>
           </a:prstGeom>
         </p:spPr>
         <p:txBody>
-          <a:bodyPr/>
+          <a:bodyPr numCol="1" spcCol="38100"/>
           <a:lstStyle>
-            <a:lvl1pPr marL="638923" indent="-469900">
+            <a:lvl1pPr marL="469900" indent="-300876">
               <a:spcBef>
                 <a:spcPts val="0"/>
               </a:spcBef>
               <a:buSzTx/>
               <a:buNone/>
-              <a:defRPr spc="-170" sz="8500">
+              <a:defRPr spc="-200" sz="8500">
                 <a:latin typeface="Helvetica Neue Medium"/>
                 <a:ea typeface="Helvetica Neue Medium"/>
                 <a:cs typeface="Helvetica Neue Medium"/>
                 <a:sym typeface="Helvetica Neue Medium"/>
               </a:defRPr>
             </a:lvl1pPr>
-            <a:lvl2pPr marL="638923" indent="-12700">
-              <a:spcBef>
-                <a:spcPts val="0"/>
-              </a:spcBef>
-              <a:buSzTx/>
-              <a:buNone/>
-              <a:defRPr spc="-170" sz="8500">
-                <a:latin typeface="Helvetica Neue Medium"/>
-                <a:ea typeface="Helvetica Neue Medium"/>
-                <a:cs typeface="Helvetica Neue Medium"/>
-                <a:sym typeface="Helvetica Neue Medium"/>
-              </a:defRPr>
-            </a:lvl2pPr>
-            <a:lvl3pPr marL="638923" indent="444500">
-              <a:spcBef>
-                <a:spcPts val="0"/>
-              </a:spcBef>
-              <a:buSzTx/>
-              <a:buNone/>
-              <a:defRPr spc="-170" sz="8500">
-                <a:latin typeface="Helvetica Neue Medium"/>
-                <a:ea typeface="Helvetica Neue Medium"/>
-                <a:cs typeface="Helvetica Neue Medium"/>
-                <a:sym typeface="Helvetica Neue Medium"/>
-              </a:defRPr>
-            </a:lvl3pPr>
-            <a:lvl4pPr marL="638923" indent="901700">
-              <a:spcBef>
-                <a:spcPts val="0"/>
-              </a:spcBef>
-              <a:buSzTx/>
-              <a:buNone/>
-              <a:defRPr spc="-170" sz="8500">
-                <a:latin typeface="Helvetica Neue Medium"/>
-                <a:ea typeface="Helvetica Neue Medium"/>
-                <a:cs typeface="Helvetica Neue Medium"/>
-                <a:sym typeface="Helvetica Neue Medium"/>
-              </a:defRPr>
-            </a:lvl4pPr>
-            <a:lvl5pPr marL="638923" indent="1358900">
-              <a:spcBef>
-                <a:spcPts val="0"/>
-              </a:spcBef>
-              <a:buSzTx/>
-              <a:buNone/>
-              <a:defRPr spc="-170" sz="8500">
-                <a:latin typeface="Helvetica Neue Medium"/>
-                <a:ea typeface="Helvetica Neue Medium"/>
-                <a:cs typeface="Helvetica Neue Medium"/>
-                <a:sym typeface="Helvetica Neue Medium"/>
-              </a:defRPr>
-            </a:lvl5pPr>
           </a:lstStyle>
           <a:p>
             <a:pPr/>
             <a:r>
               <a:t>«Важная цитата»</a:t>
-            </a:r>
-          </a:p>
-          <a:p>
-            <a:pPr lvl="1"/>
-            <a:r>
-              <a:t/>
-            </a:r>
-          </a:p>
-          <a:p>
-            <a:pPr lvl="2"/>
-            <a:r>
-              <a:t/>
-            </a:r>
-          </a:p>
-          <a:p>
-            <a:pPr lvl="3"/>
-            <a:r>
-              <a:t/>
-            </a:r>
-          </a:p>
-          <a:p>
-            <a:pPr lvl="4"/>
-            <a:r>
-              <a:t/>
             </a:r>
           </a:p>
         </p:txBody>
@@ -1691,7 +1718,7 @@
           </a:prstGeom>
         </p:spPr>
         <p:txBody>
-          <a:bodyPr lIns="91439" tIns="45719" rIns="91439" bIns="45719">
+          <a:bodyPr lIns="91439" tIns="45719" rIns="91439" bIns="45719" numCol="1" spcCol="38100">
             <a:noAutofit/>
           </a:bodyPr>
           <a:lstStyle/>
@@ -1718,7 +1745,7 @@
           </a:prstGeom>
         </p:spPr>
         <p:txBody>
-          <a:bodyPr lIns="91439" tIns="45719" rIns="91439" bIns="45719">
+          <a:bodyPr lIns="91439" tIns="45719" rIns="91439" bIns="45719" numCol="1" spcCol="38100">
             <a:noAutofit/>
           </a:bodyPr>
           <a:lstStyle/>
@@ -1745,7 +1772,7 @@
           </a:prstGeom>
         </p:spPr>
         <p:txBody>
-          <a:bodyPr lIns="91439" tIns="45719" rIns="91439" bIns="45719">
+          <a:bodyPr lIns="91439" tIns="45719" rIns="91439" bIns="45719" numCol="1" spcCol="38100">
             <a:noAutofit/>
           </a:bodyPr>
           <a:lstStyle/>
@@ -1820,7 +1847,7 @@
           </a:prstGeom>
         </p:spPr>
         <p:txBody>
-          <a:bodyPr lIns="91439" tIns="45719" rIns="91439" bIns="45719">
+          <a:bodyPr lIns="91439" tIns="45719" rIns="91439" bIns="45719" numCol="1" spcCol="38100">
             <a:noAutofit/>
           </a:bodyPr>
           <a:lstStyle/>
@@ -1951,7 +1978,7 @@
           </a:prstGeom>
         </p:spPr>
         <p:txBody>
-          <a:bodyPr lIns="91439" tIns="45719" rIns="91439" bIns="45719">
+          <a:bodyPr lIns="91439" tIns="45719" rIns="91439" bIns="45719" numCol="1" spcCol="38100">
             <a:noAutofit/>
           </a:bodyPr>
           <a:lstStyle/>
@@ -1994,23 +2021,23 @@
       </p:sp>
       <p:sp>
         <p:nvSpPr>
-          <p:cNvPr id="23" name="Автор и дата"/>
-          <p:cNvSpPr txBox="1"/>
-          <p:nvPr>
-            <p:ph type="body" sz="quarter" idx="22" hasCustomPrompt="1"/>
+          <p:cNvPr id="23" name="Уровень текста 1…"/>
+          <p:cNvSpPr txBox="1"/>
+          <p:nvPr>
+            <p:ph type="body" sz="quarter" idx="1" hasCustomPrompt="1"/>
           </p:nvPr>
         </p:nvSpPr>
         <p:spPr>
           <a:xfrm>
             <a:off x="1207690" y="1106137"/>
-            <a:ext cx="21968621" cy="636979"/>
+            <a:ext cx="21968621" cy="636980"/>
           </a:xfrm>
           <a:prstGeom prst="rect">
             <a:avLst/>
           </a:prstGeom>
         </p:spPr>
         <p:txBody>
-          <a:bodyPr lIns="45719" tIns="45719" rIns="45719" bIns="45719"/>
+          <a:bodyPr lIns="45718" tIns="45718" rIns="45718" bIns="45718" numCol="1" spcCol="38100"/>
           <a:lstStyle>
             <a:lvl1pPr marL="0" indent="0" defTabSz="825500">
               <a:lnSpc>
@@ -2023,6 +2050,42 @@
               <a:buNone/>
               <a:defRPr b="1" sz="3600"/>
             </a:lvl1pPr>
+            <a:lvl2pPr marL="1066800" indent="-457200" defTabSz="825500">
+              <a:lnSpc>
+                <a:spcPct val="100000"/>
+              </a:lnSpc>
+              <a:spcBef>
+                <a:spcPts val="0"/>
+              </a:spcBef>
+              <a:defRPr b="1" sz="3600"/>
+            </a:lvl2pPr>
+            <a:lvl3pPr marL="1676400" indent="-457200" defTabSz="825500">
+              <a:lnSpc>
+                <a:spcPct val="100000"/>
+              </a:lnSpc>
+              <a:spcBef>
+                <a:spcPts val="0"/>
+              </a:spcBef>
+              <a:defRPr b="1" sz="3600"/>
+            </a:lvl3pPr>
+            <a:lvl4pPr marL="2286000" indent="-457200" defTabSz="825500">
+              <a:lnSpc>
+                <a:spcPct val="100000"/>
+              </a:lnSpc>
+              <a:spcBef>
+                <a:spcPts val="0"/>
+              </a:spcBef>
+              <a:defRPr b="1" sz="3600"/>
+            </a:lvl4pPr>
+            <a:lvl5pPr marL="2895600" indent="-457200" defTabSz="825500">
+              <a:lnSpc>
+                <a:spcPct val="100000"/>
+              </a:lnSpc>
+              <a:spcBef>
+                <a:spcPts val="0"/>
+              </a:spcBef>
+              <a:defRPr b="1" sz="3600"/>
+            </a:lvl5pPr>
           </a:lstStyle>
           <a:p>
             <a:pPr/>
@@ -2030,6 +2093,30 @@
               <a:t>Автор и дата</a:t>
             </a:r>
           </a:p>
+          <a:p>
+            <a:pPr lvl="1"/>
+            <a:r>
+              <a:t/>
+            </a:r>
+          </a:p>
+          <a:p>
+            <a:pPr lvl="2"/>
+            <a:r>
+              <a:t/>
+            </a:r>
+          </a:p>
+          <a:p>
+            <a:pPr lvl="3"/>
+            <a:r>
+              <a:t/>
+            </a:r>
+          </a:p>
+          <a:p>
+            <a:pPr lvl="4"/>
+            <a:r>
+              <a:t/>
+            </a:r>
+          </a:p>
         </p:txBody>
       </p:sp>
       <p:sp>
@@ -2037,20 +2124,20 @@
           <p:cNvPr id="24" name="Уровень текста 1…"/>
           <p:cNvSpPr txBox="1"/>
           <p:nvPr>
-            <p:ph type="body" sz="quarter" idx="1" hasCustomPrompt="1"/>
+            <p:ph type="body" sz="quarter" idx="22" hasCustomPrompt="1"/>
           </p:nvPr>
         </p:nvSpPr>
         <p:spPr>
           <a:xfrm>
-            <a:off x="1206500" y="11609910"/>
-            <a:ext cx="21971000" cy="1116952"/>
+            <a:off x="1206500" y="11609909"/>
+            <a:ext cx="21971000" cy="1116953"/>
           </a:xfrm>
           <a:prstGeom prst="rect">
             <a:avLst/>
           </a:prstGeom>
         </p:spPr>
         <p:txBody>
-          <a:bodyPr/>
+          <a:bodyPr numCol="1" spcCol="38100"/>
           <a:lstStyle>
             <a:lvl1pPr marL="0" indent="0" defTabSz="825500">
               <a:lnSpc>
@@ -2063,79 +2150,11 @@
               <a:buNone/>
               <a:defRPr b="1" sz="5500"/>
             </a:lvl1pPr>
-            <a:lvl2pPr marL="0" indent="457200" defTabSz="825500">
-              <a:lnSpc>
-                <a:spcPct val="100000"/>
-              </a:lnSpc>
-              <a:spcBef>
-                <a:spcPts val="0"/>
-              </a:spcBef>
-              <a:buSzTx/>
-              <a:buNone/>
-              <a:defRPr b="1" sz="5500"/>
-            </a:lvl2pPr>
-            <a:lvl3pPr marL="0" indent="914400" defTabSz="825500">
-              <a:lnSpc>
-                <a:spcPct val="100000"/>
-              </a:lnSpc>
-              <a:spcBef>
-                <a:spcPts val="0"/>
-              </a:spcBef>
-              <a:buSzTx/>
-              <a:buNone/>
-              <a:defRPr b="1" sz="5500"/>
-            </a:lvl3pPr>
-            <a:lvl4pPr marL="0" indent="1371600" defTabSz="825500">
-              <a:lnSpc>
-                <a:spcPct val="100000"/>
-              </a:lnSpc>
-              <a:spcBef>
-                <a:spcPts val="0"/>
-              </a:spcBef>
-              <a:buSzTx/>
-              <a:buNone/>
-              <a:defRPr b="1" sz="5500"/>
-            </a:lvl4pPr>
-            <a:lvl5pPr marL="0" indent="1828800" defTabSz="825500">
-              <a:lnSpc>
-                <a:spcPct val="100000"/>
-              </a:lnSpc>
-              <a:spcBef>
-                <a:spcPts val="0"/>
-              </a:spcBef>
-              <a:buSzTx/>
-              <a:buNone/>
-              <a:defRPr b="1" sz="5500"/>
-            </a:lvl5pPr>
           </a:lstStyle>
           <a:p>
             <a:pPr/>
             <a:r>
               <a:t>Подзаголовок презентации</a:t>
-            </a:r>
-          </a:p>
-          <a:p>
-            <a:pPr lvl="1"/>
-            <a:r>
-              <a:t/>
-            </a:r>
-          </a:p>
-          <a:p>
-            <a:pPr lvl="2"/>
-            <a:r>
-              <a:t/>
-            </a:r>
-          </a:p>
-          <a:p>
-            <a:pPr lvl="3"/>
-            <a:r>
-              <a:t/>
-            </a:r>
-          </a:p>
-          <a:p>
-            <a:pPr lvl="4"/>
-            <a:r>
-              <a:t/>
             </a:r>
           </a:p>
         </p:txBody>
@@ -2206,7 +2225,7 @@
           </a:prstGeom>
         </p:spPr>
         <p:txBody>
-          <a:bodyPr lIns="91439" tIns="45719" rIns="91439" bIns="45719">
+          <a:bodyPr lIns="91439" tIns="45719" rIns="91439" bIns="45719" numCol="1" spcCol="38100">
             <a:noAutofit/>
           </a:bodyPr>
           <a:lstStyle/>
@@ -2226,7 +2245,7 @@
         <p:spPr>
           <a:xfrm>
             <a:off x="1206500" y="1270000"/>
-            <a:ext cx="9779000" cy="5882273"/>
+            <a:ext cx="9779000" cy="5882274"/>
           </a:xfrm>
           <a:prstGeom prst="rect">
             <a:avLst/>
@@ -2261,7 +2280,7 @@
           </a:prstGeom>
         </p:spPr>
         <p:txBody>
-          <a:bodyPr/>
+          <a:bodyPr numCol="1" spcCol="38100"/>
           <a:lstStyle>
             <a:lvl1pPr marL="0" indent="0" defTabSz="825500">
               <a:lnSpc>
@@ -2274,7 +2293,7 @@
               <a:buNone/>
               <a:defRPr b="1" sz="5500"/>
             </a:lvl1pPr>
-            <a:lvl2pPr marL="0" indent="457200" defTabSz="825500">
+            <a:lvl2pPr marL="0" indent="0" defTabSz="825500">
               <a:lnSpc>
                 <a:spcPct val="100000"/>
               </a:lnSpc>
@@ -2285,7 +2304,7 @@
               <a:buNone/>
               <a:defRPr b="1" sz="5500"/>
             </a:lvl2pPr>
-            <a:lvl3pPr marL="0" indent="914400" defTabSz="825500">
+            <a:lvl3pPr marL="0" indent="0" defTabSz="825500">
               <a:lnSpc>
                 <a:spcPct val="100000"/>
               </a:lnSpc>
@@ -2296,7 +2315,7 @@
               <a:buNone/>
               <a:defRPr b="1" sz="5500"/>
             </a:lvl3pPr>
-            <a:lvl4pPr marL="0" indent="1371600" defTabSz="825500">
+            <a:lvl4pPr marL="0" indent="0" defTabSz="825500">
               <a:lnSpc>
                 <a:spcPct val="100000"/>
               </a:lnSpc>
@@ -2307,7 +2326,7 @@
               <a:buNone/>
               <a:defRPr b="1" sz="5500"/>
             </a:lvl4pPr>
-            <a:lvl5pPr marL="0" indent="1828800" defTabSz="825500">
+            <a:lvl5pPr marL="0" indent="0" defTabSz="825500">
               <a:lnSpc>
                 <a:spcPct val="100000"/>
               </a:lnSpc>
@@ -2412,6 +2431,10 @@
           </p:nvPr>
         </p:nvSpPr>
         <p:spPr>
+          <a:xfrm>
+            <a:off x="1206500" y="1079500"/>
+            <a:ext cx="21971000" cy="1433164"/>
+          </a:xfrm>
           <a:prstGeom prst="rect">
             <a:avLst/>
           </a:prstGeom>
@@ -2429,23 +2452,23 @@
       </p:sp>
       <p:sp>
         <p:nvSpPr>
-          <p:cNvPr id="43" name="Подзаголовок слайда"/>
-          <p:cNvSpPr txBox="1"/>
-          <p:nvPr>
-            <p:ph type="body" sz="quarter" idx="21" hasCustomPrompt="1"/>
+          <p:cNvPr id="43" name="Уровень текста 1…"/>
+          <p:cNvSpPr txBox="1"/>
+          <p:nvPr>
+            <p:ph type="body" sz="quarter" idx="1" hasCustomPrompt="1"/>
           </p:nvPr>
         </p:nvSpPr>
         <p:spPr>
           <a:xfrm>
-            <a:off x="1206500" y="2372962"/>
-            <a:ext cx="21971000" cy="934780"/>
+            <a:off x="1206500" y="2372961"/>
+            <a:ext cx="21971000" cy="934781"/>
           </a:xfrm>
           <a:prstGeom prst="rect">
             <a:avLst/>
           </a:prstGeom>
         </p:spPr>
         <p:txBody>
-          <a:bodyPr lIns="45719" tIns="45719" rIns="45719" bIns="45719"/>
+          <a:bodyPr lIns="45718" tIns="45718" rIns="45718" bIns="45718" numCol="1" spcCol="38100"/>
           <a:lstStyle>
             <a:lvl1pPr marL="0" indent="0" defTabSz="825500">
               <a:lnSpc>
@@ -2458,6 +2481,42 @@
               <a:buNone/>
               <a:defRPr b="1" sz="5500"/>
             </a:lvl1pPr>
+            <a:lvl2pPr marL="1308100" indent="-698500" defTabSz="825500">
+              <a:lnSpc>
+                <a:spcPct val="100000"/>
+              </a:lnSpc>
+              <a:spcBef>
+                <a:spcPts val="0"/>
+              </a:spcBef>
+              <a:defRPr b="1" sz="5500"/>
+            </a:lvl2pPr>
+            <a:lvl3pPr marL="1917700" indent="-698500" defTabSz="825500">
+              <a:lnSpc>
+                <a:spcPct val="100000"/>
+              </a:lnSpc>
+              <a:spcBef>
+                <a:spcPts val="0"/>
+              </a:spcBef>
+              <a:defRPr b="1" sz="5500"/>
+            </a:lvl3pPr>
+            <a:lvl4pPr marL="2527300" indent="-698500" defTabSz="825500">
+              <a:lnSpc>
+                <a:spcPct val="100000"/>
+              </a:lnSpc>
+              <a:spcBef>
+                <a:spcPts val="0"/>
+              </a:spcBef>
+              <a:defRPr b="1" sz="5500"/>
+            </a:lvl4pPr>
+            <a:lvl5pPr marL="3136900" indent="-698500" defTabSz="825500">
+              <a:lnSpc>
+                <a:spcPct val="100000"/>
+              </a:lnSpc>
+              <a:spcBef>
+                <a:spcPts val="0"/>
+              </a:spcBef>
+              <a:defRPr b="1" sz="5500"/>
+            </a:lvl5pPr>
           </a:lstStyle>
           <a:p>
             <a:pPr/>
@@ -2465,6 +2524,30 @@
               <a:t>Подзаголовок слайда</a:t>
             </a:r>
           </a:p>
+          <a:p>
+            <a:pPr lvl="1"/>
+            <a:r>
+              <a:t/>
+            </a:r>
+          </a:p>
+          <a:p>
+            <a:pPr lvl="2"/>
+            <a:r>
+              <a:t/>
+            </a:r>
+          </a:p>
+          <a:p>
+            <a:pPr lvl="3"/>
+            <a:r>
+              <a:t/>
+            </a:r>
+          </a:p>
+          <a:p>
+            <a:pPr lvl="4"/>
+            <a:r>
+              <a:t/>
+            </a:r>
+          </a:p>
         </p:txBody>
       </p:sp>
       <p:sp>
@@ -2472,16 +2555,20 @@
           <p:cNvPr id="44" name="Уровень текста 1…"/>
           <p:cNvSpPr txBox="1"/>
           <p:nvPr>
-            <p:ph type="body" idx="1" hasCustomPrompt="1"/>
-          </p:nvPr>
-        </p:nvSpPr>
-        <p:spPr>
-          <a:prstGeom prst="rect">
-            <a:avLst/>
-          </a:prstGeom>
-        </p:spPr>
-        <p:txBody>
-          <a:bodyPr/>
+            <p:ph type="body" idx="21" hasCustomPrompt="1"/>
+          </p:nvPr>
+        </p:nvSpPr>
+        <p:spPr>
+          <a:xfrm>
+            <a:off x="1206500" y="4248503"/>
+            <a:ext cx="21971000" cy="8256014"/>
+          </a:xfrm>
+          <a:prstGeom prst="rect">
+            <a:avLst/>
+          </a:prstGeom>
+        </p:spPr>
+        <p:txBody>
+          <a:bodyPr numCol="1" spcCol="38100"/>
           <a:lstStyle/>
           <a:p>
             <a:pPr/>
@@ -2489,30 +2576,6 @@
               <a:t>Текст пункта на слайде</a:t>
             </a:r>
           </a:p>
-          <a:p>
-            <a:pPr lvl="1"/>
-            <a:r>
-              <a:t/>
-            </a:r>
-          </a:p>
-          <a:p>
-            <a:pPr lvl="2"/>
-            <a:r>
-              <a:t/>
-            </a:r>
-          </a:p>
-          <a:p>
-            <a:pPr lvl="3"/>
-            <a:r>
-              <a:t/>
-            </a:r>
-          </a:p>
-          <a:p>
-            <a:pPr lvl="4"/>
-            <a:r>
-              <a:t/>
-            </a:r>
-          </a:p>
         </p:txBody>
       </p:sp>
       <p:sp>
@@ -2524,6 +2587,10 @@
           </p:nvPr>
         </p:nvSpPr>
         <p:spPr>
+          <a:xfrm>
+            <a:off x="12001500" y="13080999"/>
+            <a:ext cx="368504" cy="374600"/>
+          </a:xfrm>
           <a:prstGeom prst="rect">
             <a:avLst/>
           </a:prstGeom>
@@ -2577,7 +2644,7 @@
           </a:prstGeom>
         </p:spPr>
         <p:txBody>
-          <a:bodyPr numCol="2" spcCol="1098550"/>
+          <a:bodyPr/>
           <a:lstStyle/>
           <a:p>
             <a:pPr/>
@@ -2661,23 +2728,23 @@
       </p:grpSpPr>
       <p:sp>
         <p:nvSpPr>
-          <p:cNvPr id="60" name="Подзаголовок слайда"/>
-          <p:cNvSpPr txBox="1"/>
-          <p:nvPr>
-            <p:ph type="body" sz="quarter" idx="21" hasCustomPrompt="1"/>
+          <p:cNvPr id="60" name="Уровень текста 1…"/>
+          <p:cNvSpPr txBox="1"/>
+          <p:nvPr>
+            <p:ph type="body" sz="quarter" idx="1" hasCustomPrompt="1"/>
           </p:nvPr>
         </p:nvSpPr>
         <p:spPr>
           <a:xfrm>
-            <a:off x="1206500" y="2372962"/>
-            <a:ext cx="9779000" cy="934780"/>
+            <a:off x="1206500" y="2372961"/>
+            <a:ext cx="9779000" cy="934781"/>
           </a:xfrm>
           <a:prstGeom prst="rect">
             <a:avLst/>
           </a:prstGeom>
         </p:spPr>
         <p:txBody>
-          <a:bodyPr lIns="45719" tIns="45719" rIns="45719" bIns="45719"/>
+          <a:bodyPr lIns="45718" tIns="45718" rIns="45718" bIns="45718" numCol="1" spcCol="38100"/>
           <a:lstStyle>
             <a:lvl1pPr marL="0" indent="0" defTabSz="825500">
               <a:lnSpc>
@@ -2690,6 +2757,42 @@
               <a:buNone/>
               <a:defRPr b="1" sz="5500"/>
             </a:lvl1pPr>
+            <a:lvl2pPr marL="1308100" indent="-698500" defTabSz="825500">
+              <a:lnSpc>
+                <a:spcPct val="100000"/>
+              </a:lnSpc>
+              <a:spcBef>
+                <a:spcPts val="0"/>
+              </a:spcBef>
+              <a:defRPr b="1" sz="5500"/>
+            </a:lvl2pPr>
+            <a:lvl3pPr marL="1917700" indent="-698500" defTabSz="825500">
+              <a:lnSpc>
+                <a:spcPct val="100000"/>
+              </a:lnSpc>
+              <a:spcBef>
+                <a:spcPts val="0"/>
+              </a:spcBef>
+              <a:defRPr b="1" sz="5500"/>
+            </a:lvl3pPr>
+            <a:lvl4pPr marL="2527300" indent="-698500" defTabSz="825500">
+              <a:lnSpc>
+                <a:spcPct val="100000"/>
+              </a:lnSpc>
+              <a:spcBef>
+                <a:spcPts val="0"/>
+              </a:spcBef>
+              <a:defRPr b="1" sz="5500"/>
+            </a:lvl4pPr>
+            <a:lvl5pPr marL="3136900" indent="-698500" defTabSz="825500">
+              <a:lnSpc>
+                <a:spcPct val="100000"/>
+              </a:lnSpc>
+              <a:spcBef>
+                <a:spcPts val="0"/>
+              </a:spcBef>
+              <a:defRPr b="1" sz="5500"/>
+            </a:lvl5pPr>
           </a:lstStyle>
           <a:p>
             <a:pPr/>
@@ -2697,6 +2800,30 @@
               <a:t>Подзаголовок слайда</a:t>
             </a:r>
           </a:p>
+          <a:p>
+            <a:pPr lvl="1"/>
+            <a:r>
+              <a:t/>
+            </a:r>
+          </a:p>
+          <a:p>
+            <a:pPr lvl="2"/>
+            <a:r>
+              <a:t/>
+            </a:r>
+          </a:p>
+          <a:p>
+            <a:pPr lvl="3"/>
+            <a:r>
+              <a:t/>
+            </a:r>
+          </a:p>
+          <a:p>
+            <a:pPr lvl="4"/>
+            <a:r>
+              <a:t/>
+            </a:r>
+          </a:p>
         </p:txBody>
       </p:sp>
       <p:sp>
@@ -2704,49 +2831,25 @@
           <p:cNvPr id="61" name="Уровень текста 1…"/>
           <p:cNvSpPr txBox="1"/>
           <p:nvPr>
-            <p:ph type="body" sz="half" idx="1" hasCustomPrompt="1"/>
+            <p:ph type="body" sz="half" idx="21" hasCustomPrompt="1"/>
           </p:nvPr>
         </p:nvSpPr>
         <p:spPr>
           <a:xfrm>
-            <a:off x="1206500" y="4248504"/>
-            <a:ext cx="9779000" cy="8256630"/>
+            <a:off x="1206500" y="4248503"/>
+            <a:ext cx="9779000" cy="8256631"/>
           </a:xfrm>
           <a:prstGeom prst="rect">
             <a:avLst/>
           </a:prstGeom>
         </p:spPr>
         <p:txBody>
-          <a:bodyPr/>
+          <a:bodyPr numCol="1" spcCol="38100"/>
           <a:lstStyle/>
           <a:p>
             <a:pPr/>
             <a:r>
               <a:t>Текст пункта на слайде</a:t>
-            </a:r>
-          </a:p>
-          <a:p>
-            <a:pPr lvl="1"/>
-            <a:r>
-              <a:t/>
-            </a:r>
-          </a:p>
-          <a:p>
-            <a:pPr lvl="2"/>
-            <a:r>
-              <a:t/>
-            </a:r>
-          </a:p>
-          <a:p>
-            <a:pPr lvl="3"/>
-            <a:r>
-              <a:t/>
-            </a:r>
-          </a:p>
-          <a:p>
-            <a:pPr lvl="4"/>
-            <a:r>
-              <a:t/>
             </a:r>
           </a:p>
         </p:txBody>
@@ -2762,14 +2865,14 @@
         <p:spPr>
           <a:xfrm>
             <a:off x="12192000" y="-407266"/>
-            <a:ext cx="10916874" cy="14555832"/>
+            <a:ext cx="10916874" cy="14555833"/>
           </a:xfrm>
           <a:prstGeom prst="rect">
             <a:avLst/>
           </a:prstGeom>
         </p:spPr>
         <p:txBody>
-          <a:bodyPr lIns="91439" tIns="45719" rIns="91439" bIns="45719">
+          <a:bodyPr lIns="91439" tIns="45719" rIns="91439" bIns="45719" numCol="1" spcCol="38100">
             <a:noAutofit/>
           </a:bodyPr>
           <a:lstStyle/>
@@ -2856,23 +2959,23 @@
       </p:grpSpPr>
       <p:sp>
         <p:nvSpPr>
-          <p:cNvPr id="71" name="Подзаголовок слайда"/>
-          <p:cNvSpPr txBox="1"/>
-          <p:nvPr>
-            <p:ph type="body" sz="quarter" idx="21" hasCustomPrompt="1"/>
+          <p:cNvPr id="71" name="Уровень текста 1…"/>
+          <p:cNvSpPr txBox="1"/>
+          <p:nvPr>
+            <p:ph type="body" sz="quarter" idx="1" hasCustomPrompt="1"/>
           </p:nvPr>
         </p:nvSpPr>
         <p:spPr>
           <a:xfrm>
-            <a:off x="1206500" y="2372962"/>
-            <a:ext cx="9779000" cy="934780"/>
+            <a:off x="1206500" y="2372961"/>
+            <a:ext cx="9779000" cy="934781"/>
           </a:xfrm>
           <a:prstGeom prst="rect">
             <a:avLst/>
           </a:prstGeom>
         </p:spPr>
         <p:txBody>
-          <a:bodyPr lIns="45719" tIns="45719" rIns="45719" bIns="45719"/>
+          <a:bodyPr lIns="45718" tIns="45718" rIns="45718" bIns="45718" numCol="1" spcCol="38100"/>
           <a:lstStyle>
             <a:lvl1pPr marL="0" indent="0" defTabSz="825500">
               <a:lnSpc>
@@ -2885,6 +2988,42 @@
               <a:buNone/>
               <a:defRPr b="1" sz="5500"/>
             </a:lvl1pPr>
+            <a:lvl2pPr marL="1308100" indent="-698500" defTabSz="825500">
+              <a:lnSpc>
+                <a:spcPct val="100000"/>
+              </a:lnSpc>
+              <a:spcBef>
+                <a:spcPts val="0"/>
+              </a:spcBef>
+              <a:defRPr b="1" sz="5500"/>
+            </a:lvl2pPr>
+            <a:lvl3pPr marL="1917700" indent="-698500" defTabSz="825500">
+              <a:lnSpc>
+                <a:spcPct val="100000"/>
+              </a:lnSpc>
+              <a:spcBef>
+                <a:spcPts val="0"/>
+              </a:spcBef>
+              <a:defRPr b="1" sz="5500"/>
+            </a:lvl3pPr>
+            <a:lvl4pPr marL="2527300" indent="-698500" defTabSz="825500">
+              <a:lnSpc>
+                <a:spcPct val="100000"/>
+              </a:lnSpc>
+              <a:spcBef>
+                <a:spcPts val="0"/>
+              </a:spcBef>
+              <a:defRPr b="1" sz="5500"/>
+            </a:lvl4pPr>
+            <a:lvl5pPr marL="3136900" indent="-698500" defTabSz="825500">
+              <a:lnSpc>
+                <a:spcPct val="100000"/>
+              </a:lnSpc>
+              <a:spcBef>
+                <a:spcPts val="0"/>
+              </a:spcBef>
+              <a:defRPr b="1" sz="5500"/>
+            </a:lvl5pPr>
           </a:lstStyle>
           <a:p>
             <a:pPr/>
@@ -2892,6 +3031,30 @@
               <a:t>Подзаголовок слайда</a:t>
             </a:r>
           </a:p>
+          <a:p>
+            <a:pPr lvl="1"/>
+            <a:r>
+              <a:t/>
+            </a:r>
+          </a:p>
+          <a:p>
+            <a:pPr lvl="2"/>
+            <a:r>
+              <a:t/>
+            </a:r>
+          </a:p>
+          <a:p>
+            <a:pPr lvl="3"/>
+            <a:r>
+              <a:t/>
+            </a:r>
+          </a:p>
+          <a:p>
+            <a:pPr lvl="4"/>
+            <a:r>
+              <a:t/>
+            </a:r>
+          </a:p>
         </p:txBody>
       </p:sp>
       <p:sp>
@@ -2899,49 +3062,25 @@
           <p:cNvPr id="72" name="Уровень текста 1…"/>
           <p:cNvSpPr txBox="1"/>
           <p:nvPr>
-            <p:ph type="body" sz="half" idx="1" hasCustomPrompt="1"/>
+            <p:ph type="body" sz="half" idx="21" hasCustomPrompt="1"/>
           </p:nvPr>
         </p:nvSpPr>
         <p:spPr>
           <a:xfrm>
-            <a:off x="1206500" y="4248504"/>
-            <a:ext cx="9779000" cy="8256630"/>
+            <a:off x="1206500" y="4248503"/>
+            <a:ext cx="9779000" cy="8256631"/>
           </a:xfrm>
           <a:prstGeom prst="rect">
             <a:avLst/>
           </a:prstGeom>
         </p:spPr>
         <p:txBody>
-          <a:bodyPr/>
+          <a:bodyPr numCol="1" spcCol="38100"/>
           <a:lstStyle/>
           <a:p>
             <a:pPr/>
             <a:r>
               <a:t>Текст пункта на слайде</a:t>
-            </a:r>
-          </a:p>
-          <a:p>
-            <a:pPr lvl="1"/>
-            <a:r>
-              <a:t/>
-            </a:r>
-          </a:p>
-          <a:p>
-            <a:pPr lvl="2"/>
-            <a:r>
-              <a:t/>
-            </a:r>
-          </a:p>
-          <a:p>
-            <a:pPr lvl="3"/>
-            <a:r>
-              <a:t/>
-            </a:r>
-          </a:p>
-          <a:p>
-            <a:pPr lvl="4"/>
-            <a:r>
-              <a:t/>
             </a:r>
           </a:p>
         </p:txBody>
@@ -3024,23 +3163,23 @@
       </p:grpSpPr>
       <p:sp>
         <p:nvSpPr>
-          <p:cNvPr id="81" name="Подзаголовок слайда"/>
-          <p:cNvSpPr txBox="1"/>
-          <p:nvPr>
-            <p:ph type="body" sz="quarter" idx="21" hasCustomPrompt="1"/>
+          <p:cNvPr id="81" name="Уровень текста 1…"/>
+          <p:cNvSpPr txBox="1"/>
+          <p:nvPr>
+            <p:ph type="body" sz="quarter" idx="1" hasCustomPrompt="1"/>
           </p:nvPr>
         </p:nvSpPr>
         <p:spPr>
           <a:xfrm>
-            <a:off x="1206500" y="2372962"/>
-            <a:ext cx="9779000" cy="934780"/>
+            <a:off x="1206500" y="2372961"/>
+            <a:ext cx="9779000" cy="934781"/>
           </a:xfrm>
           <a:prstGeom prst="rect">
             <a:avLst/>
           </a:prstGeom>
         </p:spPr>
         <p:txBody>
-          <a:bodyPr lIns="45719" tIns="45719" rIns="45719" bIns="45719"/>
+          <a:bodyPr lIns="45718" tIns="45718" rIns="45718" bIns="45718" numCol="1" spcCol="38100"/>
           <a:lstStyle>
             <a:lvl1pPr marL="0" indent="0" defTabSz="825500">
               <a:lnSpc>
@@ -3053,6 +3192,42 @@
               <a:buNone/>
               <a:defRPr b="1" sz="5500"/>
             </a:lvl1pPr>
+            <a:lvl2pPr marL="1308100" indent="-698500" defTabSz="825500">
+              <a:lnSpc>
+                <a:spcPct val="100000"/>
+              </a:lnSpc>
+              <a:spcBef>
+                <a:spcPts val="0"/>
+              </a:spcBef>
+              <a:defRPr b="1" sz="5500"/>
+            </a:lvl2pPr>
+            <a:lvl3pPr marL="1917700" indent="-698500" defTabSz="825500">
+              <a:lnSpc>
+                <a:spcPct val="100000"/>
+              </a:lnSpc>
+              <a:spcBef>
+                <a:spcPts val="0"/>
+              </a:spcBef>
+              <a:defRPr b="1" sz="5500"/>
+            </a:lvl3pPr>
+            <a:lvl4pPr marL="2527300" indent="-698500" defTabSz="825500">
+              <a:lnSpc>
+                <a:spcPct val="100000"/>
+              </a:lnSpc>
+              <a:spcBef>
+                <a:spcPts val="0"/>
+              </a:spcBef>
+              <a:defRPr b="1" sz="5500"/>
+            </a:lvl4pPr>
+            <a:lvl5pPr marL="3136900" indent="-698500" defTabSz="825500">
+              <a:lnSpc>
+                <a:spcPct val="100000"/>
+              </a:lnSpc>
+              <a:spcBef>
+                <a:spcPts val="0"/>
+              </a:spcBef>
+              <a:defRPr b="1" sz="5500"/>
+            </a:lvl5pPr>
           </a:lstStyle>
           <a:p>
             <a:pPr/>
@@ -3060,6 +3235,30 @@
               <a:t>Подзаголовок слайда</a:t>
             </a:r>
           </a:p>
+          <a:p>
+            <a:pPr lvl="1"/>
+            <a:r>
+              <a:t/>
+            </a:r>
+          </a:p>
+          <a:p>
+            <a:pPr lvl="2"/>
+            <a:r>
+              <a:t/>
+            </a:r>
+          </a:p>
+          <a:p>
+            <a:pPr lvl="3"/>
+            <a:r>
+              <a:t/>
+            </a:r>
+          </a:p>
+          <a:p>
+            <a:pPr lvl="4"/>
+            <a:r>
+              <a:t/>
+            </a:r>
+          </a:p>
         </p:txBody>
       </p:sp>
       <p:sp>
@@ -3067,49 +3266,25 @@
           <p:cNvPr id="82" name="Уровень текста 1…"/>
           <p:cNvSpPr txBox="1"/>
           <p:nvPr>
-            <p:ph type="body" sz="half" idx="1" hasCustomPrompt="1"/>
+            <p:ph type="body" sz="half" idx="21" hasCustomPrompt="1"/>
           </p:nvPr>
         </p:nvSpPr>
         <p:spPr>
           <a:xfrm>
-            <a:off x="1206500" y="4248504"/>
-            <a:ext cx="9779000" cy="8256630"/>
+            <a:off x="1206500" y="4248503"/>
+            <a:ext cx="9779000" cy="8256631"/>
           </a:xfrm>
           <a:prstGeom prst="rect">
             <a:avLst/>
           </a:prstGeom>
         </p:spPr>
         <p:txBody>
-          <a:bodyPr/>
+          <a:bodyPr numCol="1" spcCol="38100"/>
           <a:lstStyle/>
           <a:p>
             <a:pPr/>
             <a:r>
               <a:t>Текст пункта на слайде</a:t>
-            </a:r>
-          </a:p>
-          <a:p>
-            <a:pPr lvl="1"/>
-            <a:r>
-              <a:t/>
-            </a:r>
-          </a:p>
-          <a:p>
-            <a:pPr lvl="2"/>
-            <a:r>
-              <a:t/>
-            </a:r>
-          </a:p>
-          <a:p>
-            <a:pPr lvl="3"/>
-            <a:r>
-              <a:t/>
-            </a:r>
-          </a:p>
-          <a:p>
-            <a:pPr lvl="4"/>
-            <a:r>
-              <a:t/>
             </a:r>
           </a:p>
         </p:txBody>
@@ -3201,7 +3376,7 @@
         <p:spPr>
           <a:xfrm>
             <a:off x="1206496" y="4533900"/>
-            <a:ext cx="21971004" cy="4648200"/>
+            <a:ext cx="21971005" cy="4648200"/>
           </a:xfrm>
           <a:prstGeom prst="rect">
             <a:avLst/>
@@ -3288,16 +3463,16 @@
       </p:grpSpPr>
       <p:sp>
         <p:nvSpPr>
-          <p:cNvPr id="2" name="Заголовок слайда"/>
-          <p:cNvSpPr txBox="1"/>
-          <p:nvPr>
-            <p:ph type="title" hasCustomPrompt="1"/>
+          <p:cNvPr id="2" name="Уровень текста 1…"/>
+          <p:cNvSpPr txBox="1"/>
+          <p:nvPr>
+            <p:ph type="body" idx="1" hasCustomPrompt="1"/>
           </p:nvPr>
         </p:nvSpPr>
         <p:spPr>
           <a:xfrm>
-            <a:off x="1206500" y="1079500"/>
-            <a:ext cx="21971000" cy="1433163"/>
+            <a:off x="1206500" y="4248503"/>
+            <a:ext cx="21971000" cy="8256014"/>
           </a:xfrm>
           <a:prstGeom prst="rect">
             <a:avLst/>
@@ -3312,30 +3487,54 @@
           </a:extLst>
         </p:spPr>
         <p:txBody>
-          <a:bodyPr lIns="50800" tIns="50800" rIns="50800" bIns="50800">
+          <a:bodyPr lIns="50800" tIns="50800" rIns="50800" bIns="50800" numCol="2" spcCol="1098550">
             <a:normAutofit fontScale="100000" lnSpcReduction="0"/>
           </a:bodyPr>
           <a:lstStyle/>
           <a:p>
             <a:pPr/>
             <a:r>
-              <a:t>Заголовок слайда</a:t>
-            </a:r>
-          </a:p>
-        </p:txBody>
-      </p:sp>
-      <p:sp>
-        <p:nvSpPr>
-          <p:cNvPr id="3" name="Уровень текста 1…"/>
-          <p:cNvSpPr txBox="1"/>
-          <p:nvPr>
-            <p:ph type="body" idx="1" hasCustomPrompt="1"/>
+              <a:t>Текст пункта на слайде</a:t>
+            </a:r>
+          </a:p>
+          <a:p>
+            <a:pPr lvl="1"/>
+            <a:r>
+              <a:t/>
+            </a:r>
+          </a:p>
+          <a:p>
+            <a:pPr lvl="2"/>
+            <a:r>
+              <a:t/>
+            </a:r>
+          </a:p>
+          <a:p>
+            <a:pPr lvl="3"/>
+            <a:r>
+              <a:t/>
+            </a:r>
+          </a:p>
+          <a:p>
+            <a:pPr lvl="4"/>
+            <a:r>
+              <a:t/>
+            </a:r>
+          </a:p>
+        </p:txBody>
+      </p:sp>
+      <p:sp>
+        <p:nvSpPr>
+          <p:cNvPr id="3" name="Текст заголовка"/>
+          <p:cNvSpPr txBox="1"/>
+          <p:nvPr>
+            <p:ph type="title"/>
           </p:nvPr>
         </p:nvSpPr>
         <p:spPr>
           <a:xfrm>
-            <a:off x="1206500" y="4248504"/>
-            <a:ext cx="21971000" cy="8256012"/>
+            <a:off x="3653366" y="2743200"/>
+            <a:ext cx="19507201" cy="1505304"/>
           </a:xfrm>
           <a:prstGeom prst="rect">
             <a:avLst/>
@@ -3357,31 +3556,7 @@
           <a:p>
             <a:pPr/>
             <a:r>
-              <a:t>Текст пункта на слайде</a:t>
-            </a:r>
-          </a:p>
-          <a:p>
-            <a:pPr lvl="1"/>
-            <a:r>
-              <a:t/>
-            </a:r>
-          </a:p>
-          <a:p>
-            <a:pPr lvl="2"/>
-            <a:r>
-              <a:t/>
-            </a:r>
-          </a:p>
-          <a:p>
-            <a:pPr lvl="3"/>
-            <a:r>
-              <a:t/>
-            </a:r>
-          </a:p>
-          <a:p>
-            <a:pPr lvl="4"/>
-            <a:r>
-              <a:t/>
+              <a:t>Текст заголовка</a:t>
             </a:r>
           </a:p>
         </p:txBody>
@@ -3452,7 +3627,7 @@
   <p:transition xmlns:p14="http://schemas.microsoft.com/office/powerpoint/2010/main" spd="med" advClick="1"/>
   <p:txStyles>
     <p:titleStyle>
-      <a:lvl1pPr marL="0" marR="0" indent="0" algn="l" defTabSz="2438338" rtl="0" latinLnBrk="0">
+      <a:lvl1pPr marL="0" marR="0" indent="0" algn="l" defTabSz="2438337" rtl="0" latinLnBrk="0">
         <a:lnSpc>
           <a:spcPct val="80000"/>
         </a:lnSpc>
@@ -3472,13 +3647,13 @@
             <a:srgbClr val="000000"/>
           </a:solidFill>
           <a:uFillTx/>
-          <a:latin typeface="+mn-lt"/>
-          <a:ea typeface="+mn-ea"/>
-          <a:cs typeface="+mn-cs"/>
+          <a:latin typeface="+mj-lt"/>
+          <a:ea typeface="+mj-ea"/>
+          <a:cs typeface="+mj-cs"/>
           <a:sym typeface="Helvetica Neue"/>
         </a:defRPr>
       </a:lvl1pPr>
-      <a:lvl2pPr marL="0" marR="0" indent="457200" algn="l" defTabSz="2438338" rtl="0" latinLnBrk="0">
+      <a:lvl2pPr marL="0" marR="0" indent="0" algn="l" defTabSz="2438337" rtl="0" latinLnBrk="0">
         <a:lnSpc>
           <a:spcPct val="80000"/>
         </a:lnSpc>
@@ -3498,13 +3673,13 @@
             <a:srgbClr val="000000"/>
           </a:solidFill>
           <a:uFillTx/>
-          <a:latin typeface="+mn-lt"/>
-          <a:ea typeface="+mn-ea"/>
-          <a:cs typeface="+mn-cs"/>
+          <a:latin typeface="+mj-lt"/>
+          <a:ea typeface="+mj-ea"/>
+          <a:cs typeface="+mj-cs"/>
           <a:sym typeface="Helvetica Neue"/>
         </a:defRPr>
       </a:lvl2pPr>
-      <a:lvl3pPr marL="0" marR="0" indent="914400" algn="l" defTabSz="2438338" rtl="0" latinLnBrk="0">
+      <a:lvl3pPr marL="0" marR="0" indent="0" algn="l" defTabSz="2438337" rtl="0" latinLnBrk="0">
         <a:lnSpc>
           <a:spcPct val="80000"/>
         </a:lnSpc>
@@ -3524,13 +3699,13 @@
             <a:srgbClr val="000000"/>
           </a:solidFill>
           <a:uFillTx/>
-          <a:latin typeface="+mn-lt"/>
-          <a:ea typeface="+mn-ea"/>
-          <a:cs typeface="+mn-cs"/>
+          <a:latin typeface="+mj-lt"/>
+          <a:ea typeface="+mj-ea"/>
+          <a:cs typeface="+mj-cs"/>
           <a:sym typeface="Helvetica Neue"/>
         </a:defRPr>
       </a:lvl3pPr>
-      <a:lvl4pPr marL="0" marR="0" indent="1371600" algn="l" defTabSz="2438338" rtl="0" latinLnBrk="0">
+      <a:lvl4pPr marL="0" marR="0" indent="0" algn="l" defTabSz="2438337" rtl="0" latinLnBrk="0">
         <a:lnSpc>
           <a:spcPct val="80000"/>
         </a:lnSpc>
@@ -3550,13 +3725,13 @@
             <a:srgbClr val="000000"/>
           </a:solidFill>
           <a:uFillTx/>
-          <a:latin typeface="+mn-lt"/>
-          <a:ea typeface="+mn-ea"/>
-          <a:cs typeface="+mn-cs"/>
+          <a:latin typeface="+mj-lt"/>
+          <a:ea typeface="+mj-ea"/>
+          <a:cs typeface="+mj-cs"/>
           <a:sym typeface="Helvetica Neue"/>
         </a:defRPr>
       </a:lvl4pPr>
-      <a:lvl5pPr marL="0" marR="0" indent="1828800" algn="l" defTabSz="2438338" rtl="0" latinLnBrk="0">
+      <a:lvl5pPr marL="0" marR="0" indent="0" algn="l" defTabSz="2438337" rtl="0" latinLnBrk="0">
         <a:lnSpc>
           <a:spcPct val="80000"/>
         </a:lnSpc>
@@ -3576,13 +3751,13 @@
             <a:srgbClr val="000000"/>
           </a:solidFill>
           <a:uFillTx/>
-          <a:latin typeface="+mn-lt"/>
-          <a:ea typeface="+mn-ea"/>
-          <a:cs typeface="+mn-cs"/>
+          <a:latin typeface="+mj-lt"/>
+          <a:ea typeface="+mj-ea"/>
+          <a:cs typeface="+mj-cs"/>
           <a:sym typeface="Helvetica Neue"/>
         </a:defRPr>
       </a:lvl5pPr>
-      <a:lvl6pPr marL="0" marR="0" indent="2286000" algn="l" defTabSz="2438338" rtl="0" latinLnBrk="0">
+      <a:lvl6pPr marL="0" marR="0" indent="0" algn="l" defTabSz="2438337" rtl="0" latinLnBrk="0">
         <a:lnSpc>
           <a:spcPct val="80000"/>
         </a:lnSpc>
@@ -3602,13 +3777,13 @@
             <a:srgbClr val="000000"/>
           </a:solidFill>
           <a:uFillTx/>
-          <a:latin typeface="+mn-lt"/>
-          <a:ea typeface="+mn-ea"/>
-          <a:cs typeface="+mn-cs"/>
+          <a:latin typeface="+mj-lt"/>
+          <a:ea typeface="+mj-ea"/>
+          <a:cs typeface="+mj-cs"/>
           <a:sym typeface="Helvetica Neue"/>
         </a:defRPr>
       </a:lvl6pPr>
-      <a:lvl7pPr marL="0" marR="0" indent="2743200" algn="l" defTabSz="2438338" rtl="0" latinLnBrk="0">
+      <a:lvl7pPr marL="0" marR="0" indent="0" algn="l" defTabSz="2438337" rtl="0" latinLnBrk="0">
         <a:lnSpc>
           <a:spcPct val="80000"/>
         </a:lnSpc>
@@ -3628,13 +3803,13 @@
             <a:srgbClr val="000000"/>
           </a:solidFill>
           <a:uFillTx/>
-          <a:latin typeface="+mn-lt"/>
-          <a:ea typeface="+mn-ea"/>
-          <a:cs typeface="+mn-cs"/>
+          <a:latin typeface="+mj-lt"/>
+          <a:ea typeface="+mj-ea"/>
+          <a:cs typeface="+mj-cs"/>
           <a:sym typeface="Helvetica Neue"/>
         </a:defRPr>
       </a:lvl7pPr>
-      <a:lvl8pPr marL="0" marR="0" indent="3200400" algn="l" defTabSz="2438338" rtl="0" latinLnBrk="0">
+      <a:lvl8pPr marL="0" marR="0" indent="0" algn="l" defTabSz="2438337" rtl="0" latinLnBrk="0">
         <a:lnSpc>
           <a:spcPct val="80000"/>
         </a:lnSpc>
@@ -3654,13 +3829,13 @@
             <a:srgbClr val="000000"/>
           </a:solidFill>
           <a:uFillTx/>
-          <a:latin typeface="+mn-lt"/>
-          <a:ea typeface="+mn-ea"/>
-          <a:cs typeface="+mn-cs"/>
+          <a:latin typeface="+mj-lt"/>
+          <a:ea typeface="+mj-ea"/>
+          <a:cs typeface="+mj-cs"/>
           <a:sym typeface="Helvetica Neue"/>
         </a:defRPr>
       </a:lvl8pPr>
-      <a:lvl9pPr marL="0" marR="0" indent="3657600" algn="l" defTabSz="2438338" rtl="0" latinLnBrk="0">
+      <a:lvl9pPr marL="0" marR="0" indent="0" algn="l" defTabSz="2438337" rtl="0" latinLnBrk="0">
         <a:lnSpc>
           <a:spcPct val="80000"/>
         </a:lnSpc>
@@ -3680,15 +3855,15 @@
             <a:srgbClr val="000000"/>
           </a:solidFill>
           <a:uFillTx/>
-          <a:latin typeface="+mn-lt"/>
-          <a:ea typeface="+mn-ea"/>
-          <a:cs typeface="+mn-cs"/>
+          <a:latin typeface="+mj-lt"/>
+          <a:ea typeface="+mj-ea"/>
+          <a:cs typeface="+mj-cs"/>
           <a:sym typeface="Helvetica Neue"/>
         </a:defRPr>
       </a:lvl9pPr>
     </p:titleStyle>
     <p:bodyStyle>
-      <a:lvl1pPr marL="609600" marR="0" indent="-609600" algn="l" defTabSz="2438338" rtl="0" latinLnBrk="0">
+      <a:lvl1pPr marL="609600" marR="0" indent="-609600" algn="l" defTabSz="2438337" rtl="0" latinLnBrk="0">
         <a:lnSpc>
           <a:spcPct val="90000"/>
         </a:lnSpc>
@@ -3708,13 +3883,13 @@
             <a:srgbClr val="000000"/>
           </a:solidFill>
           <a:uFillTx/>
-          <a:latin typeface="+mn-lt"/>
-          <a:ea typeface="+mn-ea"/>
-          <a:cs typeface="+mn-cs"/>
+          <a:latin typeface="+mj-lt"/>
+          <a:ea typeface="+mj-ea"/>
+          <a:cs typeface="+mj-cs"/>
           <a:sym typeface="Helvetica Neue"/>
         </a:defRPr>
       </a:lvl1pPr>
-      <a:lvl2pPr marL="1219200" marR="0" indent="-609600" algn="l" defTabSz="2438338" rtl="0" latinLnBrk="0">
+      <a:lvl2pPr marL="1219200" marR="0" indent="-609600" algn="l" defTabSz="2438337" rtl="0" latinLnBrk="0">
         <a:lnSpc>
           <a:spcPct val="90000"/>
         </a:lnSpc>
@@ -3734,13 +3909,13 @@
             <a:srgbClr val="000000"/>
           </a:solidFill>
           <a:uFillTx/>
-          <a:latin typeface="+mn-lt"/>
-          <a:ea typeface="+mn-ea"/>
-          <a:cs typeface="+mn-cs"/>
+          <a:latin typeface="+mj-lt"/>
+          <a:ea typeface="+mj-ea"/>
+          <a:cs typeface="+mj-cs"/>
           <a:sym typeface="Helvetica Neue"/>
         </a:defRPr>
       </a:lvl2pPr>
-      <a:lvl3pPr marL="1828800" marR="0" indent="-609600" algn="l" defTabSz="2438338" rtl="0" latinLnBrk="0">
+      <a:lvl3pPr marL="1828800" marR="0" indent="-609600" algn="l" defTabSz="2438337" rtl="0" latinLnBrk="0">
         <a:lnSpc>
           <a:spcPct val="90000"/>
         </a:lnSpc>
@@ -3760,13 +3935,13 @@
             <a:srgbClr val="000000"/>
           </a:solidFill>
           <a:uFillTx/>
-          <a:latin typeface="+mn-lt"/>
-          <a:ea typeface="+mn-ea"/>
-          <a:cs typeface="+mn-cs"/>
+          <a:latin typeface="+mj-lt"/>
+          <a:ea typeface="+mj-ea"/>
+          <a:cs typeface="+mj-cs"/>
           <a:sym typeface="Helvetica Neue"/>
         </a:defRPr>
       </a:lvl3pPr>
-      <a:lvl4pPr marL="2438400" marR="0" indent="-609600" algn="l" defTabSz="2438338" rtl="0" latinLnBrk="0">
+      <a:lvl4pPr marL="2438400" marR="0" indent="-609600" algn="l" defTabSz="2438337" rtl="0" latinLnBrk="0">
         <a:lnSpc>
           <a:spcPct val="90000"/>
         </a:lnSpc>
@@ -3786,13 +3961,13 @@
             <a:srgbClr val="000000"/>
           </a:solidFill>
           <a:uFillTx/>
-          <a:latin typeface="+mn-lt"/>
-          <a:ea typeface="+mn-ea"/>
-          <a:cs typeface="+mn-cs"/>
+          <a:latin typeface="+mj-lt"/>
+          <a:ea typeface="+mj-ea"/>
+          <a:cs typeface="+mj-cs"/>
           <a:sym typeface="Helvetica Neue"/>
         </a:defRPr>
       </a:lvl4pPr>
-      <a:lvl5pPr marL="3048000" marR="0" indent="-609600" algn="l" defTabSz="2438338" rtl="0" latinLnBrk="0">
+      <a:lvl5pPr marL="3048000" marR="0" indent="-609600" algn="l" defTabSz="2438337" rtl="0" latinLnBrk="0">
         <a:lnSpc>
           <a:spcPct val="90000"/>
         </a:lnSpc>
@@ -3812,13 +3987,13 @@
             <a:srgbClr val="000000"/>
           </a:solidFill>
           <a:uFillTx/>
-          <a:latin typeface="+mn-lt"/>
-          <a:ea typeface="+mn-ea"/>
-          <a:cs typeface="+mn-cs"/>
+          <a:latin typeface="+mj-lt"/>
+          <a:ea typeface="+mj-ea"/>
+          <a:cs typeface="+mj-cs"/>
           <a:sym typeface="Helvetica Neue"/>
         </a:defRPr>
       </a:lvl5pPr>
-      <a:lvl6pPr marL="3657600" marR="0" indent="-609600" algn="l" defTabSz="2438338" rtl="0" latinLnBrk="0">
+      <a:lvl6pPr marL="3657600" marR="0" indent="-609600" algn="l" defTabSz="2438337" rtl="0" latinLnBrk="0">
         <a:lnSpc>
           <a:spcPct val="90000"/>
         </a:lnSpc>
@@ -3838,13 +4013,13 @@
             <a:srgbClr val="000000"/>
           </a:solidFill>
           <a:uFillTx/>
-          <a:latin typeface="+mn-lt"/>
-          <a:ea typeface="+mn-ea"/>
-          <a:cs typeface="+mn-cs"/>
+          <a:latin typeface="+mj-lt"/>
+          <a:ea typeface="+mj-ea"/>
+          <a:cs typeface="+mj-cs"/>
           <a:sym typeface="Helvetica Neue"/>
         </a:defRPr>
       </a:lvl6pPr>
-      <a:lvl7pPr marL="4267200" marR="0" indent="-609600" algn="l" defTabSz="2438338" rtl="0" latinLnBrk="0">
+      <a:lvl7pPr marL="4267200" marR="0" indent="-609600" algn="l" defTabSz="2438337" rtl="0" latinLnBrk="0">
         <a:lnSpc>
           <a:spcPct val="90000"/>
         </a:lnSpc>
@@ -3864,13 +4039,13 @@
             <a:srgbClr val="000000"/>
           </a:solidFill>
           <a:uFillTx/>
-          <a:latin typeface="+mn-lt"/>
-          <a:ea typeface="+mn-ea"/>
-          <a:cs typeface="+mn-cs"/>
+          <a:latin typeface="+mj-lt"/>
+          <a:ea typeface="+mj-ea"/>
+          <a:cs typeface="+mj-cs"/>
           <a:sym typeface="Helvetica Neue"/>
         </a:defRPr>
       </a:lvl7pPr>
-      <a:lvl8pPr marL="4876800" marR="0" indent="-609600" algn="l" defTabSz="2438338" rtl="0" latinLnBrk="0">
+      <a:lvl8pPr marL="4876800" marR="0" indent="-609600" algn="l" defTabSz="2438337" rtl="0" latinLnBrk="0">
         <a:lnSpc>
           <a:spcPct val="90000"/>
         </a:lnSpc>
@@ -3890,13 +4065,13 @@
             <a:srgbClr val="000000"/>
           </a:solidFill>
           <a:uFillTx/>
-          <a:latin typeface="+mn-lt"/>
-          <a:ea typeface="+mn-ea"/>
-          <a:cs typeface="+mn-cs"/>
+          <a:latin typeface="+mj-lt"/>
+          <a:ea typeface="+mj-ea"/>
+          <a:cs typeface="+mj-cs"/>
           <a:sym typeface="Helvetica Neue"/>
         </a:defRPr>
       </a:lvl8pPr>
-      <a:lvl9pPr marL="5486400" marR="0" indent="-609600" algn="l" defTabSz="2438338" rtl="0" latinLnBrk="0">
+      <a:lvl9pPr marL="5486400" marR="0" indent="-609600" algn="l" defTabSz="2438337" rtl="0" latinLnBrk="0">
         <a:lnSpc>
           <a:spcPct val="90000"/>
         </a:lnSpc>
@@ -3916,9 +4091,9 @@
             <a:srgbClr val="000000"/>
           </a:solidFill>
           <a:uFillTx/>
-          <a:latin typeface="+mn-lt"/>
-          <a:ea typeface="+mn-ea"/>
-          <a:cs typeface="+mn-cs"/>
+          <a:latin typeface="+mj-lt"/>
+          <a:ea typeface="+mj-ea"/>
+          <a:cs typeface="+mj-cs"/>
           <a:sym typeface="Helvetica Neue"/>
         </a:defRPr>
       </a:lvl9pPr>
@@ -3950,7 +4125,7 @@
           <a:sym typeface="Helvetica Neue"/>
         </a:defRPr>
       </a:lvl1pPr>
-      <a:lvl2pPr marL="0" marR="0" indent="457200" algn="ctr" defTabSz="584200" rtl="0" latinLnBrk="0">
+      <a:lvl2pPr marL="0" marR="0" indent="0" algn="ctr" defTabSz="584200" rtl="0" latinLnBrk="0">
         <a:lnSpc>
           <a:spcPct val="100000"/>
         </a:lnSpc>
@@ -3976,7 +4151,7 @@
           <a:sym typeface="Helvetica Neue"/>
         </a:defRPr>
       </a:lvl2pPr>
-      <a:lvl3pPr marL="0" marR="0" indent="914400" algn="ctr" defTabSz="584200" rtl="0" latinLnBrk="0">
+      <a:lvl3pPr marL="0" marR="0" indent="0" algn="ctr" defTabSz="584200" rtl="0" latinLnBrk="0">
         <a:lnSpc>
           <a:spcPct val="100000"/>
         </a:lnSpc>
@@ -4002,7 +4177,7 @@
           <a:sym typeface="Helvetica Neue"/>
         </a:defRPr>
       </a:lvl3pPr>
-      <a:lvl4pPr marL="0" marR="0" indent="1371600" algn="ctr" defTabSz="584200" rtl="0" latinLnBrk="0">
+      <a:lvl4pPr marL="0" marR="0" indent="0" algn="ctr" defTabSz="584200" rtl="0" latinLnBrk="0">
         <a:lnSpc>
           <a:spcPct val="100000"/>
         </a:lnSpc>
@@ -4028,7 +4203,7 @@
           <a:sym typeface="Helvetica Neue"/>
         </a:defRPr>
       </a:lvl4pPr>
-      <a:lvl5pPr marL="0" marR="0" indent="1828800" algn="ctr" defTabSz="584200" rtl="0" latinLnBrk="0">
+      <a:lvl5pPr marL="0" marR="0" indent="0" algn="ctr" defTabSz="584200" rtl="0" latinLnBrk="0">
         <a:lnSpc>
           <a:spcPct val="100000"/>
         </a:lnSpc>
@@ -4054,7 +4229,7 @@
           <a:sym typeface="Helvetica Neue"/>
         </a:defRPr>
       </a:lvl5pPr>
-      <a:lvl6pPr marL="0" marR="0" indent="2286000" algn="ctr" defTabSz="584200" rtl="0" latinLnBrk="0">
+      <a:lvl6pPr marL="0" marR="0" indent="0" algn="ctr" defTabSz="584200" rtl="0" latinLnBrk="0">
         <a:lnSpc>
           <a:spcPct val="100000"/>
         </a:lnSpc>
@@ -4080,7 +4255,7 @@
           <a:sym typeface="Helvetica Neue"/>
         </a:defRPr>
       </a:lvl6pPr>
-      <a:lvl7pPr marL="0" marR="0" indent="2743200" algn="ctr" defTabSz="584200" rtl="0" latinLnBrk="0">
+      <a:lvl7pPr marL="0" marR="0" indent="0" algn="ctr" defTabSz="584200" rtl="0" latinLnBrk="0">
         <a:lnSpc>
           <a:spcPct val="100000"/>
         </a:lnSpc>
@@ -4106,7 +4281,7 @@
           <a:sym typeface="Helvetica Neue"/>
         </a:defRPr>
       </a:lvl7pPr>
-      <a:lvl8pPr marL="0" marR="0" indent="3200400" algn="ctr" defTabSz="584200" rtl="0" latinLnBrk="0">
+      <a:lvl8pPr marL="0" marR="0" indent="0" algn="ctr" defTabSz="584200" rtl="0" latinLnBrk="0">
         <a:lnSpc>
           <a:spcPct val="100000"/>
         </a:lnSpc>
@@ -4132,7 +4307,7 @@
           <a:sym typeface="Helvetica Neue"/>
         </a:defRPr>
       </a:lvl8pPr>
-      <a:lvl9pPr marL="0" marR="0" indent="3657600" algn="ctr" defTabSz="584200" rtl="0" latinLnBrk="0">
+      <a:lvl9pPr marL="0" marR="0" indent="0" algn="ctr" defTabSz="584200" rtl="0" latinLnBrk="0">
         <a:lnSpc>
           <a:spcPct val="100000"/>
         </a:lnSpc>
@@ -4185,10 +4360,14 @@
           <p:cNvPr id="171" name="Автор и дата"/>
           <p:cNvSpPr txBox="1"/>
           <p:nvPr>
-            <p:ph type="body" idx="21"/>
-          </p:nvPr>
-        </p:nvSpPr>
-        <p:spPr>
+            <p:ph type="body" sz="quarter" idx="1"/>
+          </p:nvPr>
+        </p:nvSpPr>
+        <p:spPr>
+          <a:xfrm>
+            <a:off x="1201341" y="11859862"/>
+            <a:ext cx="21971002" cy="636980"/>
+          </a:xfrm>
           <a:prstGeom prst="rect">
             <a:avLst/>
           </a:prstGeom>
@@ -4206,43 +4385,30 @@
           <p:cNvPr id="172" name="Docker/Kubernetes"/>
           <p:cNvSpPr txBox="1"/>
           <p:nvPr>
-            <p:ph type="ctrTitle"/>
-          </p:nvPr>
-        </p:nvSpPr>
-        <p:spPr>
+            <p:ph type="title"/>
+          </p:nvPr>
+        </p:nvSpPr>
+        <p:spPr>
+          <a:xfrm>
+            <a:off x="1206495" y="2574990"/>
+            <a:ext cx="21971006" cy="4648203"/>
+          </a:xfrm>
           <a:prstGeom prst="rect">
             <a:avLst/>
           </a:prstGeom>
         </p:spPr>
         <p:txBody>
           <a:bodyPr/>
-          <a:lstStyle/>
-          <a:p>
-            <a:pPr/>
-            <a:r>
-              <a:t>Docker/Kubernetes</a:t>
-            </a:r>
-          </a:p>
-        </p:txBody>
-      </p:sp>
-      <p:sp>
-        <p:nvSpPr>
-          <p:cNvPr id="173" name="Подзаголовок презентации"/>
-          <p:cNvSpPr txBox="1"/>
-          <p:nvPr>
-            <p:ph type="subTitle" sz="quarter" idx="1"/>
-          </p:nvPr>
-        </p:nvSpPr>
-        <p:spPr>
-          <a:prstGeom prst="rect">
-            <a:avLst/>
-          </a:prstGeom>
-        </p:spPr>
-        <p:txBody>
-          <a:bodyPr/>
-          <a:lstStyle/>
-          <a:p>
-            <a:pPr/>
+          <a:lstStyle>
+            <a:lvl1pPr>
+              <a:defRPr spc="-300"/>
+            </a:lvl1pPr>
+          </a:lstStyle>
+          <a:p>
+            <a:pPr/>
+            <a:r>
+              <a:t>Docker</a:t>
+            </a:r>
           </a:p>
         </p:txBody>
       </p:sp>
@@ -4274,13 +4440,45 @@
       </p:grpSpPr>
       <p:sp>
         <p:nvSpPr>
-          <p:cNvPr id="212" name="Docker registry"/>
+          <p:cNvPr id="211" name="Docker registry"/>
           <p:cNvSpPr txBox="1"/>
           <p:nvPr>
             <p:ph type="title"/>
           </p:nvPr>
         </p:nvSpPr>
         <p:spPr>
+          <a:prstGeom prst="rect">
+            <a:avLst/>
+          </a:prstGeom>
+        </p:spPr>
+        <p:txBody>
+          <a:bodyPr/>
+          <a:lstStyle>
+            <a:lvl1pPr>
+              <a:defRPr spc="-200"/>
+            </a:lvl1pPr>
+          </a:lstStyle>
+          <a:p>
+            <a:pPr/>
+            <a:r>
+              <a:t>Docker registry</a:t>
+            </a:r>
+          </a:p>
+        </p:txBody>
+      </p:sp>
+      <p:sp>
+        <p:nvSpPr>
+          <p:cNvPr id="212" name="Подзаголовок слайда"/>
+          <p:cNvSpPr txBox="1"/>
+          <p:nvPr>
+            <p:ph type="body" sz="quarter" idx="1"/>
+          </p:nvPr>
+        </p:nvSpPr>
+        <p:spPr>
+          <a:xfrm>
+            <a:off x="1206500" y="2372961"/>
+            <a:ext cx="21971000" cy="934780"/>
+          </a:xfrm>
           <a:prstGeom prst="rect">
             <a:avLst/>
           </a:prstGeom>
@@ -4290,45 +4488,30 @@
           <a:lstStyle/>
           <a:p>
             <a:pPr/>
-            <a:r>
-              <a:t>Docker registry</a:t>
-            </a:r>
-          </a:p>
-        </p:txBody>
-      </p:sp>
-      <p:sp>
-        <p:nvSpPr>
-          <p:cNvPr id="213" name="Подзаголовок слайда"/>
+          </a:p>
+        </p:txBody>
+      </p:sp>
+      <p:sp>
+        <p:nvSpPr>
+          <p:cNvPr id="213" name="Registry - хранилище Docker-образов. Может быть как облачным, так и self-hosted (обычно на базе Sonatype Nexus).…"/>
           <p:cNvSpPr txBox="1"/>
           <p:nvPr>
             <p:ph type="body" idx="21"/>
           </p:nvPr>
         </p:nvSpPr>
         <p:spPr>
-          <a:prstGeom prst="rect">
-            <a:avLst/>
-          </a:prstGeom>
-        </p:spPr>
-        <p:txBody>
-          <a:bodyPr/>
-          <a:lstStyle/>
-          <a:p>
-            <a:pPr/>
-          </a:p>
-        </p:txBody>
-      </p:sp>
-      <p:sp>
-        <p:nvSpPr>
-          <p:cNvPr id="214" name="Registry - хранилище Docker-образов. Может быть как облачным, так и self-hosted (обычно на базе Sonatype Nexus).…"/>
-          <p:cNvSpPr txBox="1"/>
-          <p:nvPr>
-            <p:ph type="body" idx="1"/>
-          </p:nvPr>
-        </p:nvSpPr>
-        <p:spPr>
-          <a:prstGeom prst="rect">
-            <a:avLst/>
-          </a:prstGeom>
+          <a:xfrm>
+            <a:off x="1206500" y="4248503"/>
+            <a:ext cx="21971000" cy="8256014"/>
+          </a:xfrm>
+          <a:prstGeom prst="rect">
+            <a:avLst/>
+          </a:prstGeom>
+          <a:extLst>
+            <a:ext uri="{C572A759-6A51-4108-AA02-DFA0A04FC94B}">
+              <ma14:wrappingTextBoxFlag xmlns:ma14="http://schemas.microsoft.com/office/mac/drawingml/2011/main" val="1"/>
+            </a:ext>
+          </a:extLst>
         </p:spPr>
         <p:txBody>
           <a:bodyPr/>
@@ -4375,7 +4558,7 @@
       </p:grpSpPr>
       <p:sp>
         <p:nvSpPr>
-          <p:cNvPr id="216" name="Kubernetes"/>
+          <p:cNvPr id="215" name="Работа с Docker"/>
           <p:cNvSpPr txBox="1"/>
           <p:nvPr>
             <p:ph type="title"/>
@@ -4392,20 +4575,45 @@
           <a:p>
             <a:pPr/>
             <a:r>
-              <a:t>Kubernetes</a:t>
-            </a:r>
-          </a:p>
-        </p:txBody>
-      </p:sp>
-      <p:sp>
-        <p:nvSpPr>
-          <p:cNvPr id="217" name="Предтече"/>
+              <a:t>Работа с Docker</a:t>
+            </a:r>
+          </a:p>
+        </p:txBody>
+      </p:sp>
+      <p:sp>
+        <p:nvSpPr>
+          <p:cNvPr id="216" name="Подзаголовок слайда"/>
+          <p:cNvSpPr txBox="1"/>
+          <p:nvPr>
+            <p:ph type="body" sz="quarter" idx="1"/>
+          </p:nvPr>
+        </p:nvSpPr>
+        <p:spPr>
+          <a:prstGeom prst="rect">
+            <a:avLst/>
+          </a:prstGeom>
+        </p:spPr>
+        <p:txBody>
+          <a:bodyPr/>
+          <a:lstStyle/>
+          <a:p>
+            <a:pPr/>
+          </a:p>
+        </p:txBody>
+      </p:sp>
+      <p:sp>
+        <p:nvSpPr>
+          <p:cNvPr id="217" name="Уровень текста 1…"/>
           <p:cNvSpPr txBox="1"/>
           <p:nvPr>
             <p:ph type="body" idx="21"/>
           </p:nvPr>
         </p:nvSpPr>
         <p:spPr>
+          <a:xfrm>
+            <a:off x="1206500" y="4248503"/>
+            <a:ext cx="21971000" cy="8256014"/>
+          </a:xfrm>
           <a:prstGeom prst="rect">
             <a:avLst/>
           </a:prstGeom>
@@ -4421,37 +4629,29 @@
           <a:p>
             <a:pPr/>
             <a:r>
-              <a:t>Предтече</a:t>
-            </a:r>
-          </a:p>
-        </p:txBody>
-      </p:sp>
-      <p:sp>
-        <p:nvSpPr>
-          <p:cNvPr id="218" name="Docker совершил прорыв в области сборки и запуска приложений. Однажды собранный дистрибутив можно использовать независимо от окружения, в котором он собирается или запускается (это довольно частая боль без Докера).…"/>
-          <p:cNvSpPr txBox="1"/>
-          <p:nvPr>
-            <p:ph type="body" idx="1"/>
-          </p:nvPr>
-        </p:nvSpPr>
-        <p:spPr>
-          <a:prstGeom prst="rect">
-            <a:avLst/>
-          </a:prstGeom>
-        </p:spPr>
-        <p:txBody>
-          <a:bodyPr/>
-          <a:lstStyle/>
-          <a:p>
-            <a:pPr/>
-            <a:r>
-              <a:t>Docker совершил прорыв в области сборки и запуска приложений. Однажды собранный дистрибутив можно использовать независимо от окружения, в котором он собирается или запускается (это довольно частая боль без Докера).</a:t>
-            </a:r>
-          </a:p>
-          <a:p>
-            <a:pPr/>
-            <a:r>
-              <a:t>Однако в больших приложениях часто могут использоваться десятки, сотни, а то и тысячи подприложений (сервисов). Чтобы запустить, отмасштабировать, перезапустить и провести любые другие операции с ними, нужно много ручной работы либо кучи скриптов. Как быть?</a:t>
+              <a:t>Обычно разработчика интересует несколько вещей:</a:t>
+            </a:r>
+            <a:br/>
+            <a:r>
+              <a:t>- сборка образа;</a:t>
+            </a:r>
+            <a:br/>
+            <a:r>
+              <a:t>- запуск контейнера;</a:t>
+            </a:r>
+            <a:br/>
+            <a:r>
+              <a:t>- запуск нескольких контейнеров;</a:t>
+            </a:r>
+            <a:br/>
+            <a:r>
+              <a:t>- что-нибудь поделать внутри контейнера (посмотреть ФС, проверить сеть).</a:t>
+            </a:r>
+          </a:p>
+          <a:p>
+            <a:pPr/>
+            <a:r>
+              <a:t>Способ запуска нескольких контейнеров мы рассматривать здесь не будем - это отдельная большая тема.</a:t>
             </a:r>
           </a:p>
         </p:txBody>
@@ -4484,7 +4684,7 @@
       </p:grpSpPr>
       <p:sp>
         <p:nvSpPr>
-          <p:cNvPr id="220" name="Kubernetes"/>
+          <p:cNvPr id="219" name="Сборка образа"/>
           <p:cNvSpPr txBox="1"/>
           <p:nvPr>
             <p:ph type="title"/>
@@ -4501,20 +4701,45 @@
           <a:p>
             <a:pPr/>
             <a:r>
-              <a:t>Kubernetes</a:t>
-            </a:r>
-          </a:p>
-        </p:txBody>
-      </p:sp>
-      <p:sp>
-        <p:nvSpPr>
-          <p:cNvPr id="221" name="Система оркестрации контейнеров"/>
+              <a:t>Сборка образа</a:t>
+            </a:r>
+          </a:p>
+        </p:txBody>
+      </p:sp>
+      <p:sp>
+        <p:nvSpPr>
+          <p:cNvPr id="220" name="Подзаголовок слайда"/>
+          <p:cNvSpPr txBox="1"/>
+          <p:nvPr>
+            <p:ph type="body" sz="quarter" idx="1"/>
+          </p:nvPr>
+        </p:nvSpPr>
+        <p:spPr>
+          <a:prstGeom prst="rect">
+            <a:avLst/>
+          </a:prstGeom>
+        </p:spPr>
+        <p:txBody>
+          <a:bodyPr/>
+          <a:lstStyle/>
+          <a:p>
+            <a:pPr/>
+          </a:p>
+        </p:txBody>
+      </p:sp>
+      <p:sp>
+        <p:nvSpPr>
+          <p:cNvPr id="221" name="Уровень текста 1…"/>
           <p:cNvSpPr txBox="1"/>
           <p:nvPr>
             <p:ph type="body" idx="21"/>
           </p:nvPr>
         </p:nvSpPr>
         <p:spPr>
+          <a:xfrm>
+            <a:off x="1206500" y="4248503"/>
+            <a:ext cx="21971000" cy="8256014"/>
+          </a:xfrm>
           <a:prstGeom prst="rect">
             <a:avLst/>
           </a:prstGeom>
@@ -4530,37 +4755,33 @@
           <a:p>
             <a:pPr/>
             <a:r>
-              <a:t>Система оркестрации контейнеров</a:t>
-            </a:r>
-          </a:p>
-        </p:txBody>
-      </p:sp>
-      <p:sp>
-        <p:nvSpPr>
-          <p:cNvPr id="222" name="Так появился Kubernetes (часто ещё называют k8s). Это система оркестрации (то есть управления) контейнеров, которая позволяет запускать контейнеры, перезапускать, останавливать, добавлять новые и удалять старые.…"/>
-          <p:cNvSpPr txBox="1"/>
-          <p:nvPr>
-            <p:ph type="body" idx="1"/>
-          </p:nvPr>
-        </p:nvSpPr>
-        <p:spPr>
-          <a:prstGeom prst="rect">
-            <a:avLst/>
-          </a:prstGeom>
-        </p:spPr>
-        <p:txBody>
-          <a:bodyPr/>
-          <a:lstStyle/>
-          <a:p>
-            <a:pPr/>
-            <a:r>
-              <a:t>Так появился Kubernetes (часто ещё называют k8s). Это система оркестрации (то есть управления) контейнеров, которая позволяет запускать контейнеры, перезапускать, останавливать, добавлять новые и удалять старые.</a:t>
-            </a:r>
-          </a:p>
-          <a:p>
-            <a:pPr/>
-            <a:r>
-              <a:t>Все операции в нём автоматизированы и выполняются несколькими командами.</a:t>
+              <a:t>docker build &lt;flags&gt; &lt;path&gt;</a:t>
+            </a:r>
+            <a:br/>
+            <a:r>
+              <a:t>path - путь до директории, где лежит Dockerfile</a:t>
+            </a:r>
+          </a:p>
+          <a:p>
+            <a:pPr/>
+            <a:r>
+              <a:t>Популярные флаги:</a:t>
+            </a:r>
+            <a:br/>
+            <a:r>
+              <a:t>-t: указать тег (для нескольких тегов флаг дублируется);</a:t>
+            </a:r>
+            <a:br/>
+            <a:r>
+              <a:t>   - тег - метка на образе, которая позволяет обращаться использовать эту метку в качестве имени образа, а не sha256-хэш;</a:t>
+            </a:r>
+            <a:br/>
+            <a:r>
+              <a:t>   - обычно тег включает в себя версию образа (после двоеточия), если версии нет, проставляется «latest»</a:t>
+            </a:r>
+            <a:br/>
+            <a:r>
+              <a:t>-f: выбор Dockerfile для сборки, если их несколько.</a:t>
             </a:r>
           </a:p>
         </p:txBody>
@@ -4593,7 +4814,7 @@
       </p:grpSpPr>
       <p:sp>
         <p:nvSpPr>
-          <p:cNvPr id="224" name="Архитектура Kubernetes"/>
+          <p:cNvPr id="223" name="Запуск контейнера"/>
           <p:cNvSpPr txBox="1"/>
           <p:nvPr>
             <p:ph type="title"/>
@@ -4610,17 +4831,17 @@
           <a:p>
             <a:pPr/>
             <a:r>
-              <a:t>Архитектура Kubernetes</a:t>
-            </a:r>
-          </a:p>
-        </p:txBody>
-      </p:sp>
-      <p:sp>
-        <p:nvSpPr>
-          <p:cNvPr id="225" name="Подзаголовок слайда"/>
-          <p:cNvSpPr txBox="1"/>
-          <p:nvPr>
-            <p:ph type="body" idx="21"/>
+              <a:t>Запуск контейнера</a:t>
+            </a:r>
+          </a:p>
+        </p:txBody>
+      </p:sp>
+      <p:sp>
+        <p:nvSpPr>
+          <p:cNvPr id="224" name="Подзаголовок слайда"/>
+          <p:cNvSpPr txBox="1"/>
+          <p:nvPr>
+            <p:ph type="body" sz="quarter" idx="1"/>
           </p:nvPr>
         </p:nvSpPr>
         <p:spPr>
@@ -4638,54 +4859,55 @@
       </p:sp>
       <p:sp>
         <p:nvSpPr>
-          <p:cNvPr id="226" name="Текст пункта на слайде"/>
-          <p:cNvSpPr txBox="1"/>
-          <p:nvPr>
-            <p:ph type="body" idx="1"/>
-          </p:nvPr>
-        </p:nvSpPr>
-        <p:spPr>
-          <a:prstGeom prst="rect">
-            <a:avLst/>
-          </a:prstGeom>
+          <p:cNvPr id="225" name="Уровень текста 1…"/>
+          <p:cNvSpPr txBox="1"/>
+          <p:nvPr>
+            <p:ph type="body" idx="21"/>
+          </p:nvPr>
+        </p:nvSpPr>
+        <p:spPr>
+          <a:xfrm>
+            <a:off x="1206500" y="4248503"/>
+            <a:ext cx="21971000" cy="8256014"/>
+          </a:xfrm>
+          <a:prstGeom prst="rect">
+            <a:avLst/>
+          </a:prstGeom>
+          <a:extLst>
+            <a:ext uri="{C572A759-6A51-4108-AA02-DFA0A04FC94B}">
+              <ma14:wrappingTextBoxFlag xmlns:ma14="http://schemas.microsoft.com/office/mac/drawingml/2011/main" val="1"/>
+            </a:ext>
+          </a:extLst>
         </p:spPr>
         <p:txBody>
           <a:bodyPr/>
           <a:lstStyle/>
           <a:p>
             <a:pPr/>
-          </a:p>
-        </p:txBody>
-      </p:sp>
-      <p:pic>
-        <p:nvPicPr>
-          <p:cNvPr id="227" name="вставленный-фильм.png" descr="вставленный-фильм.png"/>
-          <p:cNvPicPr>
-            <a:picLocks noChangeAspect="1"/>
-          </p:cNvPicPr>
-          <p:nvPr/>
-        </p:nvPicPr>
-        <p:blipFill>
-          <a:blip r:embed="rId2">
-            <a:extLst/>
-          </a:blip>
-          <a:stretch>
-            <a:fillRect/>
-          </a:stretch>
-        </p:blipFill>
-        <p:spPr>
-          <a:xfrm>
-            <a:off x="5611728" y="3419539"/>
-            <a:ext cx="14771926" cy="9288247"/>
-          </a:xfrm>
-          <a:prstGeom prst="rect">
-            <a:avLst/>
-          </a:prstGeom>
-          <a:ln w="12700">
-            <a:miter lim="400000"/>
-          </a:ln>
-        </p:spPr>
-      </p:pic>
+            <a:r>
+              <a:t>docker run &lt;options&gt; &lt;image&gt; &lt;command&gt; &lt;args&gt;</a:t>
+            </a:r>
+          </a:p>
+          <a:p>
+            <a:pPr/>
+            <a:r>
+              <a:t>- options - опции для docker run;</a:t>
+            </a:r>
+            <a:br/>
+            <a:r>
+              <a:t>- image - sha256-хэш или тег образа;</a:t>
+            </a:r>
+            <a:br/>
+            <a:r>
+              <a:t>- command - команда для запуска при старте контейнера (об этом дальше);</a:t>
+            </a:r>
+            <a:br/>
+            <a:r>
+              <a:t>- args - аргументы для команды из &lt;command&gt;</a:t>
+            </a:r>
+          </a:p>
+        </p:txBody>
+      </p:sp>
     </p:spTree>
   </p:cSld>
   <p:clrMapOvr>
@@ -4714,7 +4936,7 @@
       </p:grpSpPr>
       <p:sp>
         <p:nvSpPr>
-          <p:cNvPr id="229" name="Основные понятия"/>
+          <p:cNvPr id="227" name="docker run"/>
           <p:cNvSpPr txBox="1"/>
           <p:nvPr>
             <p:ph type="title"/>
@@ -4729,19 +4951,19 @@
           <a:bodyPr/>
           <a:lstStyle/>
           <a:p>
-            <a:pPr/>
-            <a:r>
-              <a:t>Основные понятия</a:t>
-            </a:r>
-          </a:p>
-        </p:txBody>
-      </p:sp>
-      <p:sp>
-        <p:nvSpPr>
-          <p:cNvPr id="230" name="Подзаголовок слайда"/>
-          <p:cNvSpPr txBox="1"/>
-          <p:nvPr>
-            <p:ph type="body" idx="21"/>
+            <a:pPr lvl="1"/>
+            <a:r>
+              <a:t>docker run</a:t>
+            </a:r>
+          </a:p>
+        </p:txBody>
+      </p:sp>
+      <p:sp>
+        <p:nvSpPr>
+          <p:cNvPr id="228" name="&lt;options&gt;"/>
+          <p:cNvSpPr txBox="1"/>
+          <p:nvPr>
+            <p:ph type="body" sz="quarter" idx="1"/>
           </p:nvPr>
         </p:nvSpPr>
         <p:spPr>
@@ -4754,21 +4976,33 @@
           <a:lstStyle/>
           <a:p>
             <a:pPr/>
-          </a:p>
-        </p:txBody>
-      </p:sp>
-      <p:sp>
-        <p:nvSpPr>
-          <p:cNvPr id="231" name="Под (pod) - запущенный контейнер.…"/>
-          <p:cNvSpPr txBox="1"/>
-          <p:nvPr>
-            <p:ph type="body" idx="1"/>
-          </p:nvPr>
-        </p:nvSpPr>
-        <p:spPr>
-          <a:prstGeom prst="rect">
-            <a:avLst/>
-          </a:prstGeom>
+            <a:r>
+              <a:t>&lt;options&gt;</a:t>
+            </a:r>
+          </a:p>
+        </p:txBody>
+      </p:sp>
+      <p:sp>
+        <p:nvSpPr>
+          <p:cNvPr id="229" name="Уровень текста 1…"/>
+          <p:cNvSpPr txBox="1"/>
+          <p:nvPr>
+            <p:ph type="body" idx="21"/>
+          </p:nvPr>
+        </p:nvSpPr>
+        <p:spPr>
+          <a:xfrm>
+            <a:off x="1206500" y="4248503"/>
+            <a:ext cx="21971000" cy="8256014"/>
+          </a:xfrm>
+          <a:prstGeom prst="rect">
+            <a:avLst/>
+          </a:prstGeom>
+          <a:extLst>
+            <a:ext uri="{C572A759-6A51-4108-AA02-DFA0A04FC94B}">
+              <ma14:wrappingTextBoxFlag xmlns:ma14="http://schemas.microsoft.com/office/mac/drawingml/2011/main" val="1"/>
+            </a:ext>
+          </a:extLst>
         </p:spPr>
         <p:txBody>
           <a:bodyPr/>
@@ -4776,25 +5010,25 @@
           <a:p>
             <a:pPr/>
             <a:r>
-              <a:t>Под (pod) - запущенный контейнер.</a:t>
-            </a:r>
-          </a:p>
-          <a:p>
-            <a:pPr/>
-            <a:r>
-              <a:t>Replica set - набор запущенных идентичных подов (то есть из одного образа).</a:t>
-            </a:r>
-          </a:p>
-          <a:p>
-            <a:pPr/>
-            <a:r>
-              <a:t>Деплоймент (deployment) - сущность, позволяющая обновлять поды и replica sets.</a:t>
-            </a:r>
-          </a:p>
-          <a:p>
-            <a:pPr/>
-            <a:r>
-              <a:t>Неймспейс (namespace) - пространство для подов, в рамках которого они могут свободно общаться друг с другом. Извне пространства нужны специальные инструменты (вроде Ingress), чтобы достучаться до подов.</a:t>
+              <a:t>Позволяют настроить ресурсы, изоляцию, переопределить какие-то параметры внутри образа (типа entrypoint).</a:t>
+            </a:r>
+          </a:p>
+          <a:p>
+            <a:pPr/>
+            <a:r>
+              <a:t>Помимо них, существует несколько популярных опций:</a:t>
+            </a:r>
+            <a:br/>
+            <a:r>
+              <a:t>-v (--volume): монтирование директорий/файлов/других видов volume в контейнер;</a:t>
+            </a:r>
+            <a:br/>
+            <a:r>
+              <a:t>-it - запуск команды при старте;</a:t>
+            </a:r>
+            <a:br/>
+            <a:r>
+              <a:t>-p - маппинг портов (для нескольких опция повторяется). Нужно для веб-сервисов. </a:t>
             </a:r>
           </a:p>
         </p:txBody>
@@ -4827,7 +5061,7 @@
       </p:grpSpPr>
       <p:sp>
         <p:nvSpPr>
-          <p:cNvPr id="233" name="Деплой в кластер"/>
+          <p:cNvPr id="231" name="Volume"/>
           <p:cNvSpPr txBox="1"/>
           <p:nvPr>
             <p:ph type="title"/>
@@ -4844,17 +5078,17 @@
           <a:p>
             <a:pPr/>
             <a:r>
-              <a:t>Деплой в кластер</a:t>
-            </a:r>
-          </a:p>
-        </p:txBody>
-      </p:sp>
-      <p:sp>
-        <p:nvSpPr>
-          <p:cNvPr id="234" name="Подзаголовок слайда"/>
-          <p:cNvSpPr txBox="1"/>
-          <p:nvPr>
-            <p:ph type="body" idx="21"/>
+              <a:t>Volume</a:t>
+            </a:r>
+          </a:p>
+        </p:txBody>
+      </p:sp>
+      <p:sp>
+        <p:nvSpPr>
+          <p:cNvPr id="232" name="Подзаголовок слайда"/>
+          <p:cNvSpPr txBox="1"/>
+          <p:nvPr>
+            <p:ph type="body" sz="quarter" idx="1"/>
           </p:nvPr>
         </p:nvSpPr>
         <p:spPr>
@@ -4872,16 +5106,25 @@
       </p:sp>
       <p:sp>
         <p:nvSpPr>
-          <p:cNvPr id="235" name="1. Поступает команда на создание деплоймента.…"/>
-          <p:cNvSpPr txBox="1"/>
-          <p:nvPr>
-            <p:ph type="body" idx="1"/>
-          </p:nvPr>
-        </p:nvSpPr>
-        <p:spPr>
-          <a:prstGeom prst="rect">
-            <a:avLst/>
-          </a:prstGeom>
+          <p:cNvPr id="233" name="Уровень текста 1…"/>
+          <p:cNvSpPr txBox="1"/>
+          <p:nvPr>
+            <p:ph type="body" idx="21"/>
+          </p:nvPr>
+        </p:nvSpPr>
+        <p:spPr>
+          <a:xfrm>
+            <a:off x="1206500" y="4248503"/>
+            <a:ext cx="21971000" cy="8256014"/>
+          </a:xfrm>
+          <a:prstGeom prst="rect">
+            <a:avLst/>
+          </a:prstGeom>
+          <a:extLst>
+            <a:ext uri="{C572A759-6A51-4108-AA02-DFA0A04FC94B}">
+              <ma14:wrappingTextBoxFlag xmlns:ma14="http://schemas.microsoft.com/office/mac/drawingml/2011/main" val="1"/>
+            </a:ext>
+          </a:extLst>
         </p:spPr>
         <p:txBody>
           <a:bodyPr/>
@@ -4889,25 +5132,29 @@
           <a:p>
             <a:pPr/>
             <a:r>
-              <a:t>1. Поступает команда на создание деплоймента.</a:t>
-            </a:r>
-          </a:p>
-          <a:p>
-            <a:pPr/>
-            <a:r>
-              <a:t>В команде указывается, из какого образа его собрать. Например: kubectl create deployment &lt;name&gt; --image=docker.io/&lt;image&gt;</a:t>
-            </a:r>
-          </a:p>
-          <a:p>
-            <a:pPr/>
-            <a:r>
-              <a:t>2. K8s идёт в registry, скачивает оттуда нужный образ.</a:t>
-            </a:r>
-          </a:p>
-          <a:p>
-            <a:pPr/>
-            <a:r>
-              <a:t>3. После скачивания создаёт указанное число pod’ов в указанном неймспейсе.</a:t>
+              <a:t>Персистентное хранилище, которое можно подключить к контейнеру.</a:t>
+            </a:r>
+          </a:p>
+          <a:p>
+            <a:pPr/>
+            <a:r>
+              <a:t>Может быть файлом, директорией, диском, чем-то удалённым, доступным по сети.</a:t>
+            </a:r>
+          </a:p>
+          <a:p>
+            <a:pPr/>
+            <a:r>
+              <a:t>Можно создавать на постоянной основе, можно временно подключать при старте конкретного контейнера:</a:t>
+            </a:r>
+            <a:br/>
+            <a:r>
+              <a:t>-v путь_на_хосте:/абсолютный/путь/в/контейнере</a:t>
+            </a:r>
+          </a:p>
+          <a:p>
+            <a:pPr/>
+            <a:r>
+              <a:t>На хосте можно относительные и абсолютные пути, в контейнере - абсолютные.</a:t>
             </a:r>
           </a:p>
         </p:txBody>
@@ -4940,7 +5187,7 @@
       </p:grpSpPr>
       <p:sp>
         <p:nvSpPr>
-          <p:cNvPr id="237" name="Альтернативы"/>
+          <p:cNvPr id="235" name="docker run"/>
           <p:cNvSpPr txBox="1"/>
           <p:nvPr>
             <p:ph type="title"/>
@@ -4957,17 +5204,17 @@
           <a:p>
             <a:pPr/>
             <a:r>
-              <a:t>Альтернативы</a:t>
-            </a:r>
-          </a:p>
-        </p:txBody>
-      </p:sp>
-      <p:sp>
-        <p:nvSpPr>
-          <p:cNvPr id="238" name="Подзаголовок слайда"/>
-          <p:cNvSpPr txBox="1"/>
-          <p:nvPr>
-            <p:ph type="body" idx="21"/>
+              <a:t>docker run</a:t>
+            </a:r>
+          </a:p>
+        </p:txBody>
+      </p:sp>
+      <p:sp>
+        <p:nvSpPr>
+          <p:cNvPr id="236" name="&lt;command&gt; + &lt;args&gt;"/>
+          <p:cNvSpPr txBox="1"/>
+          <p:nvPr>
+            <p:ph type="body" sz="quarter" idx="1"/>
           </p:nvPr>
         </p:nvSpPr>
         <p:spPr>
@@ -4980,21 +5227,33 @@
           <a:lstStyle/>
           <a:p>
             <a:pPr/>
-          </a:p>
-        </p:txBody>
-      </p:sp>
-      <p:sp>
-        <p:nvSpPr>
-          <p:cNvPr id="239" name="Kubernetes - де-факто стандарт среди OpenSource систем оркестрации.…"/>
-          <p:cNvSpPr txBox="1"/>
-          <p:nvPr>
-            <p:ph type="body" idx="1"/>
-          </p:nvPr>
-        </p:nvSpPr>
-        <p:spPr>
-          <a:prstGeom prst="rect">
-            <a:avLst/>
-          </a:prstGeom>
+            <a:r>
+              <a:t>&lt;command&gt; + &lt;args&gt;</a:t>
+            </a:r>
+          </a:p>
+        </p:txBody>
+      </p:sp>
+      <p:sp>
+        <p:nvSpPr>
+          <p:cNvPr id="237" name="Уровень текста 1…"/>
+          <p:cNvSpPr txBox="1"/>
+          <p:nvPr>
+            <p:ph type="body" idx="21"/>
+          </p:nvPr>
+        </p:nvSpPr>
+        <p:spPr>
+          <a:xfrm>
+            <a:off x="1206500" y="4248503"/>
+            <a:ext cx="21971000" cy="8256014"/>
+          </a:xfrm>
+          <a:prstGeom prst="rect">
+            <a:avLst/>
+          </a:prstGeom>
+          <a:extLst>
+            <a:ext uri="{C572A759-6A51-4108-AA02-DFA0A04FC94B}">
+              <ma14:wrappingTextBoxFlag xmlns:ma14="http://schemas.microsoft.com/office/mac/drawingml/2011/main" val="1"/>
+            </a:ext>
+          </a:extLst>
         </p:spPr>
         <p:txBody>
           <a:bodyPr/>
@@ -5002,43 +5261,21 @@
           <a:p>
             <a:pPr/>
             <a:r>
-              <a:t>Kubernetes - де-факто стандарт среди OpenSource систем оркестрации.</a:t>
-            </a:r>
-          </a:p>
-          <a:p>
-            <a:pPr/>
-            <a:r>
-              <a:t>Однако у него есть альтернативы:</a:t>
-            </a:r>
-          </a:p>
-          <a:p>
-            <a:pPr/>
-            <a:r>
-              <a:t>1. Docker Swarm</a:t>
-            </a:r>
-          </a:p>
-          <a:p>
-            <a:pPr/>
-            <a:r>
-              <a:t>2. Rancher</a:t>
-            </a:r>
-          </a:p>
-          <a:p>
-            <a:pPr/>
-            <a:r>
-              <a:t>3. OpenShift (по факту, развитие Kubernetes).</a:t>
-            </a:r>
-          </a:p>
-          <a:p>
-            <a:pPr/>
-            <a:r>
-              <a:t>4. Helios</a:t>
-            </a:r>
-          </a:p>
-          <a:p>
-            <a:pPr/>
-            <a:r>
-              <a:t>и т.д.</a:t>
+              <a:t>Это должна быть команда внутри контейнера. Часто запускают какой-нибудь интерпретатор команд, чтобы можно было посмотреть всё, что интересует.</a:t>
+            </a:r>
+            <a:br/>
+            <a:r>
+              <a:t>Пример:</a:t>
+            </a:r>
+            <a:br/>
+            <a:r>
+              <a:t>docker run -it dotnet/sdk:10 /bin/bash</a:t>
+            </a:r>
+          </a:p>
+          <a:p>
+            <a:pPr/>
+            <a:r>
+              <a:t>Параметры для команды при необходимости можно передать сразу же после названия команды (через пробел).</a:t>
             </a:r>
           </a:p>
         </p:txBody>
@@ -5071,7 +5308,7 @@
       </p:grpSpPr>
       <p:sp>
         <p:nvSpPr>
-          <p:cNvPr id="241" name="Minikube"/>
+          <p:cNvPr id="239" name="docker run"/>
           <p:cNvSpPr txBox="1"/>
           <p:nvPr>
             <p:ph type="title"/>
@@ -5088,17 +5325,17 @@
           <a:p>
             <a:pPr/>
             <a:r>
-              <a:t>Minikube</a:t>
-            </a:r>
-          </a:p>
-        </p:txBody>
-      </p:sp>
-      <p:sp>
-        <p:nvSpPr>
-          <p:cNvPr id="242" name="Подзаголовок слайда"/>
-          <p:cNvSpPr txBox="1"/>
-          <p:nvPr>
-            <p:ph type="body" idx="21"/>
+              <a:t>docker run</a:t>
+            </a:r>
+          </a:p>
+        </p:txBody>
+      </p:sp>
+      <p:sp>
+        <p:nvSpPr>
+          <p:cNvPr id="240" name="-p"/>
+          <p:cNvSpPr txBox="1"/>
+          <p:nvPr>
+            <p:ph type="body" sz="quarter" idx="1"/>
           </p:nvPr>
         </p:nvSpPr>
         <p:spPr>
@@ -5111,29 +5348,62 @@
           <a:lstStyle/>
           <a:p>
             <a:pPr/>
-          </a:p>
-        </p:txBody>
-      </p:sp>
-      <p:sp>
-        <p:nvSpPr>
-          <p:cNvPr id="243" name="Minikube - однонодовый кластер k8s (всё на одной машине). С ним мы поработаем на практике."/>
-          <p:cNvSpPr txBox="1"/>
-          <p:nvPr>
-            <p:ph type="body" idx="1"/>
-          </p:nvPr>
-        </p:nvSpPr>
-        <p:spPr>
-          <a:prstGeom prst="rect">
-            <a:avLst/>
-          </a:prstGeom>
+            <a:r>
+              <a:t>-p</a:t>
+            </a:r>
+          </a:p>
+        </p:txBody>
+      </p:sp>
+      <p:sp>
+        <p:nvSpPr>
+          <p:cNvPr id="241" name="Уровень текста 1…"/>
+          <p:cNvSpPr txBox="1"/>
+          <p:nvPr>
+            <p:ph type="body" idx="21"/>
+          </p:nvPr>
+        </p:nvSpPr>
+        <p:spPr>
+          <a:xfrm>
+            <a:off x="1206500" y="4248503"/>
+            <a:ext cx="21971000" cy="8256014"/>
+          </a:xfrm>
+          <a:prstGeom prst="rect">
+            <a:avLst/>
+          </a:prstGeom>
+          <a:extLst>
+            <a:ext uri="{C572A759-6A51-4108-AA02-DFA0A04FC94B}">
+              <ma14:wrappingTextBoxFlag xmlns:ma14="http://schemas.microsoft.com/office/mac/drawingml/2011/main" val="1"/>
+            </a:ext>
+          </a:extLst>
         </p:spPr>
         <p:txBody>
           <a:bodyPr/>
           <a:lstStyle/>
           <a:p>
-            <a:pPr lvl="1"/>
-            <a:r>
-              <a:t>Minikube - однонодовый кластер k8s (всё на одной машине). С ним мы поработаем на практике.</a:t>
+            <a:pPr/>
+            <a:r>
+              <a:t>Позволяет выставить из контейнера наружу порты.</a:t>
+            </a:r>
+            <a:br/>
+            <a:r>
+              <a:t>-p src_port:dst_port</a:t>
+            </a:r>
+            <a:br/>
+            <a:r>
+              <a:t>src_port - порт в контейнере, dst_port - на хосте</a:t>
+            </a:r>
+            <a:br/>
+          </a:p>
+          <a:p>
+            <a:pPr/>
+            <a:r>
+              <a:t>Можно выставлять нескольким повтором опций.</a:t>
+            </a:r>
+          </a:p>
+          <a:p>
+            <a:pPr/>
+            <a:r>
+              <a:t>Если на хосте порт занят - контейнер не запустится.</a:t>
             </a:r>
           </a:p>
         </p:txBody>
@@ -5166,7 +5436,7 @@
       </p:grpSpPr>
       <p:sp>
         <p:nvSpPr>
-          <p:cNvPr id="245" name="Автоматизации автоматизации"/>
+          <p:cNvPr id="243" name="docker attach"/>
           <p:cNvSpPr txBox="1"/>
           <p:nvPr>
             <p:ph type="title"/>
@@ -5183,20 +5453,45 @@
           <a:p>
             <a:pPr/>
             <a:r>
-              <a:t>Автоматизации автоматизации</a:t>
-            </a:r>
-          </a:p>
-        </p:txBody>
-      </p:sp>
-      <p:sp>
-        <p:nvSpPr>
-          <p:cNvPr id="246" name="Helm"/>
+              <a:t>docker attach</a:t>
+            </a:r>
+          </a:p>
+        </p:txBody>
+      </p:sp>
+      <p:sp>
+        <p:nvSpPr>
+          <p:cNvPr id="244" name="Подзаголовок слайда"/>
+          <p:cNvSpPr txBox="1"/>
+          <p:nvPr>
+            <p:ph type="body" sz="quarter" idx="1"/>
+          </p:nvPr>
+        </p:nvSpPr>
+        <p:spPr>
+          <a:prstGeom prst="rect">
+            <a:avLst/>
+          </a:prstGeom>
+        </p:spPr>
+        <p:txBody>
+          <a:bodyPr/>
+          <a:lstStyle/>
+          <a:p>
+            <a:pPr/>
+          </a:p>
+        </p:txBody>
+      </p:sp>
+      <p:sp>
+        <p:nvSpPr>
+          <p:cNvPr id="245" name="Уровень текста 1…"/>
           <p:cNvSpPr txBox="1"/>
           <p:nvPr>
             <p:ph type="body" idx="21"/>
           </p:nvPr>
         </p:nvSpPr>
         <p:spPr>
+          <a:xfrm>
+            <a:off x="1206500" y="4248503"/>
+            <a:ext cx="21971000" cy="8256014"/>
+          </a:xfrm>
           <a:prstGeom prst="rect">
             <a:avLst/>
           </a:prstGeom>
@@ -5212,207 +5507,17 @@
           <a:p>
             <a:pPr/>
             <a:r>
-              <a:t>Helm</a:t>
-            </a:r>
-          </a:p>
-        </p:txBody>
-      </p:sp>
-      <p:sp>
-        <p:nvSpPr>
-          <p:cNvPr id="247" name="Чтобы было проще описывать сущности Kubernetes и управлять ими, придумали пакетный менеджер под названием Helm.…"/>
-          <p:cNvSpPr txBox="1"/>
-          <p:nvPr>
-            <p:ph type="body" idx="1"/>
-          </p:nvPr>
-        </p:nvSpPr>
-        <p:spPr>
-          <a:prstGeom prst="rect">
-            <a:avLst/>
-          </a:prstGeom>
-        </p:spPr>
-        <p:txBody>
-          <a:bodyPr/>
-          <a:lstStyle/>
-          <a:p>
-            <a:pPr/>
-            <a:r>
-              <a:t>Чтобы было проще описывать сущности Kubernetes и управлять ими, придумали пакетный менеджер под названием Helm.</a:t>
-            </a:r>
-          </a:p>
-          <a:p>
-            <a:pPr/>
-            <a:r>
-              <a:t>Он позволяет создавать сервисы, воркеры, джобы, создавать их релизы, устанавливать и откатывать их.</a:t>
-            </a:r>
-          </a:p>
-          <a:p>
-            <a:pPr/>
-            <a:r>
-              <a:t>Ключевое понятие - Helm chart, пакет, описывающий конкретное приложение и содержащий все необходимые ресурсы.</a:t>
-            </a:r>
-          </a:p>
-          <a:p>
-            <a:pPr/>
-            <a:r>
-              <a:t>В рамках нашего курса мы только обзорно посмотрим на него.</a:t>
-            </a:r>
-          </a:p>
-        </p:txBody>
-      </p:sp>
-    </p:spTree>
-  </p:cSld>
-  <p:clrMapOvr>
-    <a:masterClrMapping/>
-  </p:clrMapOvr>
-  <p:transition xmlns:p14="http://schemas.microsoft.com/office/powerpoint/2010/main" spd="med" advClick="1"/>
-</p:sld>
-</file>
-
-<file path=ppt/slides/slide19.xml><?xml version="1.0" encoding="utf-8"?>
-<p:sld xmlns:a="http://schemas.openxmlformats.org/drawingml/2006/main" xmlns:r="http://schemas.openxmlformats.org/officeDocument/2006/relationships" xmlns:p="http://schemas.openxmlformats.org/presentationml/2006/main" xmlns:m="http://schemas.openxmlformats.org/officeDocument/2006/math" xmlns:a14="http://schemas.microsoft.com/office/drawing/2010/main" showMasterSp="1" showMasterPhAnim="1">
-  <p:cSld>
-    <p:spTree>
-      <p:nvGrpSpPr>
-        <p:cNvPr id="1" name=""/>
-        <p:cNvGrpSpPr/>
-        <p:nvPr/>
-      </p:nvGrpSpPr>
-      <p:grpSpPr>
-        <a:xfrm>
-          <a:off x="0" y="0"/>
-          <a:ext cx="0" cy="0"/>
-          <a:chOff x="0" y="0"/>
-          <a:chExt cx="0" cy="0"/>
-        </a:xfrm>
-      </p:grpSpPr>
-      <p:sp>
-        <p:nvSpPr>
-          <p:cNvPr id="249" name="Типовая структура чарта"/>
-          <p:cNvSpPr txBox="1"/>
-          <p:nvPr>
-            <p:ph type="title"/>
-          </p:nvPr>
-        </p:nvSpPr>
-        <p:spPr>
-          <a:prstGeom prst="rect">
-            <a:avLst/>
-          </a:prstGeom>
-        </p:spPr>
-        <p:txBody>
-          <a:bodyPr/>
-          <a:lstStyle/>
-          <a:p>
-            <a:pPr/>
-            <a:r>
-              <a:t>Типовая структура чарта</a:t>
-            </a:r>
-          </a:p>
-        </p:txBody>
-      </p:sp>
-      <p:sp>
-        <p:nvSpPr>
-          <p:cNvPr id="250" name="Подзаголовок слайда"/>
-          <p:cNvSpPr txBox="1"/>
-          <p:nvPr>
-            <p:ph type="body" idx="21"/>
-          </p:nvPr>
-        </p:nvSpPr>
-        <p:spPr>
-          <a:prstGeom prst="rect">
-            <a:avLst/>
-          </a:prstGeom>
-        </p:spPr>
-        <p:txBody>
-          <a:bodyPr/>
-          <a:lstStyle/>
-          <a:p>
-            <a:pPr/>
-          </a:p>
-        </p:txBody>
-      </p:sp>
-      <p:sp>
-        <p:nvSpPr>
-          <p:cNvPr id="251" name="Самый главный файл - Chart.yaml…"/>
-          <p:cNvSpPr txBox="1"/>
-          <p:nvPr>
-            <p:ph type="body" idx="1"/>
-          </p:nvPr>
-        </p:nvSpPr>
-        <p:spPr>
-          <a:prstGeom prst="rect">
-            <a:avLst/>
-          </a:prstGeom>
-        </p:spPr>
-        <p:txBody>
-          <a:bodyPr/>
-          <a:lstStyle/>
-          <a:p>
-            <a:pPr/>
-            <a:r>
-              <a:t>Самый главный файл - Chart.yaml</a:t>
-            </a:r>
-          </a:p>
-          <a:p>
-            <a:pPr/>
-            <a:r>
-              <a:t>Он описывает сам чарт.</a:t>
-            </a:r>
-          </a:p>
-          <a:p>
-            <a:pPr/>
-            <a:r>
-              <a:t>Описание настроек приложение</a:t>
-            </a:r>
-          </a:p>
-          <a:p>
-            <a:pPr/>
-            <a:r>
-              <a:t>размазано по остальным файлам.</a:t>
-            </a:r>
-          </a:p>
-          <a:p>
-            <a:pPr/>
-            <a:r>
-              <a:t>Обычно в организациях есть</a:t>
-            </a:r>
-          </a:p>
-          <a:p>
-            <a:pPr/>
-            <a:r>
-              <a:t>уже готовые шаблоны для чартов.</a:t>
-            </a:r>
-          </a:p>
-        </p:txBody>
-      </p:sp>
-      <p:pic>
-        <p:nvPicPr>
-          <p:cNvPr id="252" name="вставленный-фильм.png" descr="вставленный-фильм.png"/>
-          <p:cNvPicPr>
-            <a:picLocks noChangeAspect="1"/>
-          </p:cNvPicPr>
-          <p:nvPr/>
-        </p:nvPicPr>
-        <p:blipFill>
-          <a:blip r:embed="rId2">
-            <a:extLst/>
-          </a:blip>
-          <a:stretch>
-            <a:fillRect/>
-          </a:stretch>
-        </p:blipFill>
-        <p:spPr>
-          <a:xfrm>
-            <a:off x="13044955" y="4443741"/>
-            <a:ext cx="6873803" cy="7104026"/>
-          </a:xfrm>
-          <a:prstGeom prst="rect">
-            <a:avLst/>
-          </a:prstGeom>
-          <a:ln w="12700">
-            <a:miter lim="400000"/>
-          </a:ln>
-        </p:spPr>
-      </p:pic>
+              <a:t>docker attach &lt;container_id&gt;</a:t>
+            </a:r>
+          </a:p>
+          <a:p>
+            <a:pPr/>
+            <a:r>
+              <a:t>Позволяет подключиться к уже работающему контейнеру.</a:t>
+            </a:r>
+          </a:p>
+        </p:txBody>
+      </p:sp>
     </p:spTree>
   </p:cSld>
   <p:clrMapOvr>
@@ -5441,13 +5546,49 @@
       </p:grpSpPr>
       <p:sp>
         <p:nvSpPr>
-          <p:cNvPr id="175" name="Docker. Что это такое?"/>
+          <p:cNvPr id="174" name="Docker. Что это такое?"/>
           <p:cNvSpPr txBox="1"/>
           <p:nvPr>
             <p:ph type="title"/>
           </p:nvPr>
         </p:nvSpPr>
         <p:spPr>
+          <a:xfrm>
+            <a:off x="1206500" y="1079499"/>
+            <a:ext cx="21971000" cy="1433165"/>
+          </a:xfrm>
+          <a:prstGeom prst="rect">
+            <a:avLst/>
+          </a:prstGeom>
+        </p:spPr>
+        <p:txBody>
+          <a:bodyPr/>
+          <a:lstStyle>
+            <a:lvl1pPr>
+              <a:defRPr spc="-200"/>
+            </a:lvl1pPr>
+          </a:lstStyle>
+          <a:p>
+            <a:pPr/>
+            <a:r>
+              <a:t>Docker. Что это такое?</a:t>
+            </a:r>
+          </a:p>
+        </p:txBody>
+      </p:sp>
+      <p:sp>
+        <p:nvSpPr>
+          <p:cNvPr id="175" name="Подзаголовок слайда"/>
+          <p:cNvSpPr txBox="1"/>
+          <p:nvPr>
+            <p:ph type="body" sz="quarter" idx="1"/>
+          </p:nvPr>
+        </p:nvSpPr>
+        <p:spPr>
+          <a:xfrm>
+            <a:off x="1206500" y="2372961"/>
+            <a:ext cx="21971000" cy="934780"/>
+          </a:xfrm>
           <a:prstGeom prst="rect">
             <a:avLst/>
           </a:prstGeom>
@@ -5457,15 +5598,12 @@
           <a:lstStyle/>
           <a:p>
             <a:pPr/>
-            <a:r>
-              <a:t>Docker. Что это такое?</a:t>
-            </a:r>
-          </a:p>
-        </p:txBody>
-      </p:sp>
-      <p:sp>
-        <p:nvSpPr>
-          <p:cNvPr id="176" name="Подзаголовок слайда"/>
+          </a:p>
+        </p:txBody>
+      </p:sp>
+      <p:sp>
+        <p:nvSpPr>
+          <p:cNvPr id="176" name="Docker - система контейнеризации (создание, запуск контейнера и управление им).…"/>
           <p:cNvSpPr txBox="1"/>
           <p:nvPr>
             <p:ph type="body" idx="21"/>
@@ -5475,33 +5613,17 @@
           <a:prstGeom prst="rect">
             <a:avLst/>
           </a:prstGeom>
+          <a:extLst>
+            <a:ext uri="{C572A759-6A51-4108-AA02-DFA0A04FC94B}">
+              <ma14:wrappingTextBoxFlag xmlns:ma14="http://schemas.microsoft.com/office/mac/drawingml/2011/main" val="1"/>
+            </a:ext>
+          </a:extLst>
         </p:spPr>
         <p:txBody>
           <a:bodyPr/>
           <a:lstStyle/>
           <a:p>
             <a:pPr/>
-          </a:p>
-        </p:txBody>
-      </p:sp>
-      <p:sp>
-        <p:nvSpPr>
-          <p:cNvPr id="177" name="Docker - система контейнеризации (создание, запуск контейнера и управление им).…"/>
-          <p:cNvSpPr txBox="1"/>
-          <p:nvPr>
-            <p:ph type="body" idx="1"/>
-          </p:nvPr>
-        </p:nvSpPr>
-        <p:spPr>
-          <a:prstGeom prst="rect">
-            <a:avLst/>
-          </a:prstGeom>
-        </p:spPr>
-        <p:txBody>
-          <a:bodyPr/>
-          <a:lstStyle/>
-          <a:p>
-            <a:pPr/>
             <a:r>
               <a:t>Docker - система контейнеризации (создание, запуск контейнера и управление им).</a:t>
             </a:r>
@@ -5516,7 +5638,7 @@
       </p:sp>
       <p:pic>
         <p:nvPicPr>
-          <p:cNvPr id="178" name="Изображение" descr="Изображение"/>
+          <p:cNvPr id="177" name="Изображение" descr="Изображение"/>
           <p:cNvPicPr>
             <a:picLocks noChangeAspect="1"/>
           </p:cNvPicPr>
@@ -5533,7 +5655,7 @@
         <p:spPr>
           <a:xfrm>
             <a:off x="14948140" y="7380337"/>
-            <a:ext cx="3492501" cy="2324101"/>
+            <a:ext cx="3492502" cy="2324102"/>
           </a:xfrm>
           <a:prstGeom prst="rect">
             <a:avLst/>
@@ -5571,13 +5693,45 @@
       </p:grpSpPr>
       <p:sp>
         <p:nvSpPr>
-          <p:cNvPr id="180" name="Предтече"/>
+          <p:cNvPr id="179" name="Предтече"/>
           <p:cNvSpPr txBox="1"/>
           <p:nvPr>
             <p:ph type="title"/>
           </p:nvPr>
         </p:nvSpPr>
         <p:spPr>
+          <a:prstGeom prst="rect">
+            <a:avLst/>
+          </a:prstGeom>
+        </p:spPr>
+        <p:txBody>
+          <a:bodyPr/>
+          <a:lstStyle>
+            <a:lvl1pPr>
+              <a:defRPr spc="-200"/>
+            </a:lvl1pPr>
+          </a:lstStyle>
+          <a:p>
+            <a:pPr/>
+            <a:r>
+              <a:t>Предтече</a:t>
+            </a:r>
+          </a:p>
+        </p:txBody>
+      </p:sp>
+      <p:sp>
+        <p:nvSpPr>
+          <p:cNvPr id="180" name="Подзаголовок слайда"/>
+          <p:cNvSpPr txBox="1"/>
+          <p:nvPr>
+            <p:ph type="body" sz="quarter" idx="1"/>
+          </p:nvPr>
+        </p:nvSpPr>
+        <p:spPr>
+          <a:xfrm>
+            <a:off x="1206500" y="2372961"/>
+            <a:ext cx="21971000" cy="934780"/>
+          </a:xfrm>
           <a:prstGeom prst="rect">
             <a:avLst/>
           </a:prstGeom>
@@ -5587,99 +5741,84 @@
           <a:lstStyle/>
           <a:p>
             <a:pPr/>
-            <a:r>
-              <a:t>Предтече</a:t>
-            </a:r>
-          </a:p>
-        </p:txBody>
-      </p:sp>
-      <p:sp>
-        <p:nvSpPr>
-          <p:cNvPr id="181" name="Подзаголовок слайда"/>
+          </a:p>
+        </p:txBody>
+      </p:sp>
+      <p:sp>
+        <p:nvSpPr>
+          <p:cNvPr id="181" name="Когда-то (даже сейчас) приложения запускались на отдельных виртуальных машинах.…"/>
           <p:cNvSpPr txBox="1"/>
           <p:nvPr>
             <p:ph type="body" idx="21"/>
           </p:nvPr>
         </p:nvSpPr>
         <p:spPr>
-          <a:prstGeom prst="rect">
-            <a:avLst/>
-          </a:prstGeom>
+          <a:xfrm>
+            <a:off x="1206500" y="4248503"/>
+            <a:ext cx="21971000" cy="8256014"/>
+          </a:xfrm>
+          <a:prstGeom prst="rect">
+            <a:avLst/>
+          </a:prstGeom>
+          <a:extLst>
+            <a:ext uri="{C572A759-6A51-4108-AA02-DFA0A04FC94B}">
+              <ma14:wrappingTextBoxFlag xmlns:ma14="http://schemas.microsoft.com/office/mac/drawingml/2011/main" val="1"/>
+            </a:ext>
+          </a:extLst>
         </p:spPr>
         <p:txBody>
           <a:bodyPr/>
           <a:lstStyle/>
           <a:p>
-            <a:pPr/>
-          </a:p>
-        </p:txBody>
-      </p:sp>
-      <p:sp>
-        <p:nvSpPr>
-          <p:cNvPr id="182" name="Когда-то (даже сейчас) приложения запускались на отдельных виртуальных машинах.…"/>
-          <p:cNvSpPr txBox="1"/>
-          <p:nvPr>
-            <p:ph type="body" idx="1"/>
-          </p:nvPr>
-        </p:nvSpPr>
-        <p:spPr>
-          <a:prstGeom prst="rect">
-            <a:avLst/>
-          </a:prstGeom>
-        </p:spPr>
-        <p:txBody>
-          <a:bodyPr/>
-          <a:lstStyle/>
-          <a:p>
-            <a:pPr marL="603504" indent="-603504" defTabSz="2413955">
+            <a:pPr marL="603504" indent="-603504" defTabSz="2413954">
               <a:spcBef>
                 <a:spcPts val="4400"/>
               </a:spcBef>
-              <a:defRPr sz="4752"/>
+              <a:defRPr sz="4700"/>
             </a:pPr>
             <a:r>
               <a:t>Когда-то (даже сейчас) приложения запускались на отдельных виртуальных машинах.</a:t>
             </a:r>
           </a:p>
           <a:p>
-            <a:pPr marL="603504" indent="-603504" defTabSz="2413955">
+            <a:pPr marL="603504" indent="-603504" defTabSz="2413954">
               <a:spcBef>
                 <a:spcPts val="4400"/>
               </a:spcBef>
-              <a:defRPr sz="4752"/>
+              <a:defRPr sz="4700"/>
             </a:pPr>
             <a:r>
               <a:t>Эти виртуальные машины нужно настраивать.</a:t>
             </a:r>
           </a:p>
           <a:p>
-            <a:pPr marL="603504" indent="-603504" defTabSz="2413955">
+            <a:pPr marL="603504" indent="-603504" defTabSz="2413954">
               <a:spcBef>
                 <a:spcPts val="4400"/>
               </a:spcBef>
-              <a:defRPr sz="4752"/>
+              <a:defRPr sz="4700"/>
             </a:pPr>
             <a:r>
               <a:t>Для Production и Dev окружения машины могли быть разными (да даже в рамках окружения такое могло быть).</a:t>
             </a:r>
           </a:p>
           <a:p>
-            <a:pPr marL="603504" indent="-603504" defTabSz="2413955">
+            <a:pPr marL="603504" indent="-603504" defTabSz="2413954">
               <a:spcBef>
                 <a:spcPts val="4400"/>
               </a:spcBef>
-              <a:defRPr sz="4752"/>
+              <a:defRPr sz="4700"/>
             </a:pPr>
             <a:r>
               <a:t>Чтобы добавить ресурсов, нужно остановить машину. Чтобы добавить реплик, нужно создать ещё одну машину.</a:t>
             </a:r>
           </a:p>
           <a:p>
-            <a:pPr marL="603504" indent="-603504" defTabSz="2413955">
+            <a:pPr marL="603504" indent="-603504" defTabSz="2413954">
               <a:spcBef>
                 <a:spcPts val="4400"/>
               </a:spcBef>
-              <a:defRPr sz="4752"/>
+              <a:defRPr sz="4700"/>
             </a:pPr>
             <a:r>
               <a:t>Это приводит к труднодиагностируемым багам и большому неудобству в эксплуатации.</a:t>
@@ -5715,13 +5854,45 @@
       </p:grpSpPr>
       <p:sp>
         <p:nvSpPr>
-          <p:cNvPr id="184" name="Контейнер"/>
+          <p:cNvPr id="183" name="Контейнер"/>
           <p:cNvSpPr txBox="1"/>
           <p:nvPr>
             <p:ph type="title"/>
           </p:nvPr>
         </p:nvSpPr>
         <p:spPr>
+          <a:prstGeom prst="rect">
+            <a:avLst/>
+          </a:prstGeom>
+        </p:spPr>
+        <p:txBody>
+          <a:bodyPr/>
+          <a:lstStyle>
+            <a:lvl1pPr>
+              <a:defRPr spc="-200"/>
+            </a:lvl1pPr>
+          </a:lstStyle>
+          <a:p>
+            <a:pPr/>
+            <a:r>
+              <a:t>Контейнер</a:t>
+            </a:r>
+          </a:p>
+        </p:txBody>
+      </p:sp>
+      <p:sp>
+        <p:nvSpPr>
+          <p:cNvPr id="184" name="Подзаголовок слайда"/>
+          <p:cNvSpPr txBox="1"/>
+          <p:nvPr>
+            <p:ph type="body" sz="quarter" idx="1"/>
+          </p:nvPr>
+        </p:nvSpPr>
+        <p:spPr>
+          <a:xfrm>
+            <a:off x="1206500" y="2372961"/>
+            <a:ext cx="21971000" cy="934780"/>
+          </a:xfrm>
           <a:prstGeom prst="rect">
             <a:avLst/>
           </a:prstGeom>
@@ -5731,45 +5902,30 @@
           <a:lstStyle/>
           <a:p>
             <a:pPr/>
-            <a:r>
-              <a:t>Контейнер</a:t>
-            </a:r>
-          </a:p>
-        </p:txBody>
-      </p:sp>
-      <p:sp>
-        <p:nvSpPr>
-          <p:cNvPr id="185" name="Подзаголовок слайда"/>
+          </a:p>
+        </p:txBody>
+      </p:sp>
+      <p:sp>
+        <p:nvSpPr>
+          <p:cNvPr id="185" name="Контейнер - приложение вместо со всем необходимым окружением - минимальная ОС, рантайм, библиотеки, веб-сервер и т.д.…"/>
           <p:cNvSpPr txBox="1"/>
           <p:nvPr>
             <p:ph type="body" idx="21"/>
           </p:nvPr>
         </p:nvSpPr>
         <p:spPr>
-          <a:prstGeom prst="rect">
-            <a:avLst/>
-          </a:prstGeom>
-        </p:spPr>
-        <p:txBody>
-          <a:bodyPr/>
-          <a:lstStyle/>
-          <a:p>
-            <a:pPr/>
-          </a:p>
-        </p:txBody>
-      </p:sp>
-      <p:sp>
-        <p:nvSpPr>
-          <p:cNvPr id="186" name="Контейнер - приложение вместо со всем необходимым окружением - минимальная ОС, рантайм, библиотеки, веб-сервер и т.д.…"/>
-          <p:cNvSpPr txBox="1"/>
-          <p:nvPr>
-            <p:ph type="body" idx="1"/>
-          </p:nvPr>
-        </p:nvSpPr>
-        <p:spPr>
-          <a:prstGeom prst="rect">
-            <a:avLst/>
-          </a:prstGeom>
+          <a:xfrm>
+            <a:off x="1206500" y="4248503"/>
+            <a:ext cx="21971000" cy="8256014"/>
+          </a:xfrm>
+          <a:prstGeom prst="rect">
+            <a:avLst/>
+          </a:prstGeom>
+          <a:extLst>
+            <a:ext uri="{C572A759-6A51-4108-AA02-DFA0A04FC94B}">
+              <ma14:wrappingTextBoxFlag xmlns:ma14="http://schemas.microsoft.com/office/mac/drawingml/2011/main" val="1"/>
+            </a:ext>
+          </a:extLst>
         </p:spPr>
         <p:txBody>
           <a:bodyPr/>
@@ -5822,13 +5978,17 @@
       </p:grpSpPr>
       <p:sp>
         <p:nvSpPr>
-          <p:cNvPr id="188" name="Заголовок слайда"/>
+          <p:cNvPr id="187" name="Заголовок слайда"/>
           <p:cNvSpPr txBox="1"/>
           <p:nvPr>
             <p:ph type="title"/>
           </p:nvPr>
         </p:nvSpPr>
         <p:spPr>
+          <a:xfrm>
+            <a:off x="1206500" y="1079499"/>
+            <a:ext cx="21971000" cy="1433165"/>
+          </a:xfrm>
           <a:prstGeom prst="rect">
             <a:avLst/>
           </a:prstGeom>
@@ -5843,13 +6003,17 @@
       </p:sp>
       <p:sp>
         <p:nvSpPr>
-          <p:cNvPr id="189" name="Подзаголовок слайда"/>
-          <p:cNvSpPr txBox="1"/>
-          <p:nvPr>
-            <p:ph type="body" idx="21"/>
-          </p:nvPr>
-        </p:nvSpPr>
-        <p:spPr>
+          <p:cNvPr id="188" name="Подзаголовок слайда"/>
+          <p:cNvSpPr txBox="1"/>
+          <p:nvPr>
+            <p:ph type="body" sz="quarter" idx="1"/>
+          </p:nvPr>
+        </p:nvSpPr>
+        <p:spPr>
+          <a:xfrm>
+            <a:off x="1206500" y="2372961"/>
+            <a:ext cx="21971000" cy="934780"/>
+          </a:xfrm>
           <a:prstGeom prst="rect">
             <a:avLst/>
           </a:prstGeom>
@@ -5864,16 +6028,21 @@
       </p:sp>
       <p:sp>
         <p:nvSpPr>
-          <p:cNvPr id="190" name="На самом деле, вопрос стоит неправильно. Часто используется не сам Docker, а именно Docker-контейнеры. Они выбраны потому, что существует огромное количество инструментов для них, они хорошо переносимы (в отличие от HyperV/Windows-контейнеров).…"/>
-          <p:cNvSpPr txBox="1"/>
-          <p:nvPr>
-            <p:ph type="body" idx="1"/>
-          </p:nvPr>
-        </p:nvSpPr>
-        <p:spPr>
-          <a:prstGeom prst="rect">
-            <a:avLst/>
-          </a:prstGeom>
+          <p:cNvPr id="189" name="На самом деле, вопрос стоит неправильно. Часто используется не сам Docker, а именно Docker-контейнеры. Они выбраны потому, что существует огромное количество инструментов для них, они хорошо переносимы (в отличие от HyperV/Windows-контейнеров).…"/>
+          <p:cNvSpPr txBox="1"/>
+          <p:nvPr>
+            <p:ph type="body" idx="21"/>
+          </p:nvPr>
+        </p:nvSpPr>
+        <p:spPr>
+          <a:prstGeom prst="rect">
+            <a:avLst/>
+          </a:prstGeom>
+          <a:extLst>
+            <a:ext uri="{C572A759-6A51-4108-AA02-DFA0A04FC94B}">
+              <ma14:wrappingTextBoxFlag xmlns:ma14="http://schemas.microsoft.com/office/mac/drawingml/2011/main" val="1"/>
+            </a:ext>
+          </a:extLst>
         </p:spPr>
         <p:txBody>
           <a:bodyPr/>
@@ -5894,7 +6063,7 @@
       </p:sp>
       <p:pic>
         <p:nvPicPr>
-          <p:cNvPr id="191" name="Изображение" descr="Изображение"/>
+          <p:cNvPr id="190" name="Изображение" descr="Изображение"/>
           <p:cNvPicPr>
             <a:picLocks noChangeAspect="1"/>
           </p:cNvPicPr>
@@ -5910,8 +6079,8 @@
         </p:blipFill>
         <p:spPr>
           <a:xfrm>
-            <a:off x="13694264" y="9878822"/>
-            <a:ext cx="7848601" cy="2489201"/>
+            <a:off x="13694263" y="9878821"/>
+            <a:ext cx="7848602" cy="2489202"/>
           </a:xfrm>
           <a:prstGeom prst="rect">
             <a:avLst/>
@@ -5923,7 +6092,7 @@
       </p:pic>
       <p:pic>
         <p:nvPicPr>
-          <p:cNvPr id="192" name="Изображение" descr="Изображение"/>
+          <p:cNvPr id="191" name="Изображение" descr="Изображение"/>
           <p:cNvPicPr>
             <a:picLocks noChangeAspect="1"/>
           </p:cNvPicPr>
@@ -5939,8 +6108,8 @@
         </p:blipFill>
         <p:spPr>
           <a:xfrm>
-            <a:off x="3108611" y="9726422"/>
-            <a:ext cx="7899401" cy="2794001"/>
+            <a:off x="3108611" y="9726421"/>
+            <a:ext cx="7899401" cy="2794002"/>
           </a:xfrm>
           <a:prstGeom prst="rect">
             <a:avLst/>
@@ -5978,13 +6147,49 @@
       </p:grpSpPr>
       <p:sp>
         <p:nvSpPr>
-          <p:cNvPr id="194" name="Архитектура"/>
+          <p:cNvPr id="193" name="Архитектура"/>
           <p:cNvSpPr txBox="1"/>
           <p:nvPr>
             <p:ph type="title"/>
           </p:nvPr>
         </p:nvSpPr>
         <p:spPr>
+          <a:xfrm>
+            <a:off x="1206500" y="1079499"/>
+            <a:ext cx="21971000" cy="1433165"/>
+          </a:xfrm>
+          <a:prstGeom prst="rect">
+            <a:avLst/>
+          </a:prstGeom>
+        </p:spPr>
+        <p:txBody>
+          <a:bodyPr/>
+          <a:lstStyle>
+            <a:lvl1pPr>
+              <a:defRPr spc="-200"/>
+            </a:lvl1pPr>
+          </a:lstStyle>
+          <a:p>
+            <a:pPr/>
+            <a:r>
+              <a:t>Архитектура</a:t>
+            </a:r>
+          </a:p>
+        </p:txBody>
+      </p:sp>
+      <p:sp>
+        <p:nvSpPr>
+          <p:cNvPr id="194" name="Чем контейнеризация отличается от виртуальных машин?"/>
+          <p:cNvSpPr txBox="1"/>
+          <p:nvPr>
+            <p:ph type="body" sz="quarter" idx="1"/>
+          </p:nvPr>
+        </p:nvSpPr>
+        <p:spPr>
+          <a:xfrm>
+            <a:off x="1206500" y="2372961"/>
+            <a:ext cx="21971000" cy="934780"/>
+          </a:xfrm>
           <a:prstGeom prst="rect">
             <a:avLst/>
           </a:prstGeom>
@@ -5995,14 +6200,14 @@
           <a:p>
             <a:pPr/>
             <a:r>
-              <a:t>Архитектура</a:t>
-            </a:r>
-          </a:p>
-        </p:txBody>
-      </p:sp>
-      <p:sp>
-        <p:nvSpPr>
-          <p:cNvPr id="195" name="Чем контейнеризация отличается от виртуальных машин?"/>
+              <a:t>Чем контейнеризация отличается от виртуальных машин?</a:t>
+            </a:r>
+          </a:p>
+        </p:txBody>
+      </p:sp>
+      <p:sp>
+        <p:nvSpPr>
+          <p:cNvPr id="195" name="Контейнер работает поверх родительской ОС, это не полноценная виртуальная машина. Он работает за счёт изоляции ресурсов посредством механизма cgroups в Linux."/>
           <p:cNvSpPr txBox="1"/>
           <p:nvPr>
             <p:ph type="body" idx="21"/>
@@ -6024,30 +6229,6 @@
           <a:p>
             <a:pPr/>
             <a:r>
-              <a:t>Чем контейнеризация отличается от виртуальных машин?</a:t>
-            </a:r>
-          </a:p>
-        </p:txBody>
-      </p:sp>
-      <p:sp>
-        <p:nvSpPr>
-          <p:cNvPr id="196" name="Контейнер работает поверх родительской ОС, это не полноценная виртуальная машина. Он работает за счёт изоляции ресурсов посредством механизма cgroups в Linux."/>
-          <p:cNvSpPr txBox="1"/>
-          <p:nvPr>
-            <p:ph type="body" idx="1"/>
-          </p:nvPr>
-        </p:nvSpPr>
-        <p:spPr>
-          <a:prstGeom prst="rect">
-            <a:avLst/>
-          </a:prstGeom>
-        </p:spPr>
-        <p:txBody>
-          <a:bodyPr/>
-          <a:lstStyle/>
-          <a:p>
-            <a:pPr/>
-            <a:r>
               <a:t>Контейнер работает поверх родительской ОС, это не полноценная виртуальная машина. Он работает за счёт изоляции ресурсов посредством механизма cgroups в Linux.</a:t>
             </a:r>
           </a:p>
@@ -6055,7 +6236,7 @@
       </p:sp>
       <p:pic>
         <p:nvPicPr>
-          <p:cNvPr id="197" name="Изображение" descr="Изображение"/>
+          <p:cNvPr id="196" name="Изображение" descr="Изображение"/>
           <p:cNvPicPr>
             <a:picLocks noChangeAspect="1"/>
           </p:cNvPicPr>
@@ -6110,13 +6291,45 @@
       </p:grpSpPr>
       <p:sp>
         <p:nvSpPr>
-          <p:cNvPr id="199" name="Docker-образ"/>
+          <p:cNvPr id="198" name="Docker-образ"/>
           <p:cNvSpPr txBox="1"/>
           <p:nvPr>
             <p:ph type="title"/>
           </p:nvPr>
         </p:nvSpPr>
         <p:spPr>
+          <a:prstGeom prst="rect">
+            <a:avLst/>
+          </a:prstGeom>
+        </p:spPr>
+        <p:txBody>
+          <a:bodyPr/>
+          <a:lstStyle>
+            <a:lvl1pPr>
+              <a:defRPr spc="-200"/>
+            </a:lvl1pPr>
+          </a:lstStyle>
+          <a:p>
+            <a:pPr/>
+            <a:r>
+              <a:t>Docker-образ</a:t>
+            </a:r>
+          </a:p>
+        </p:txBody>
+      </p:sp>
+      <p:sp>
+        <p:nvSpPr>
+          <p:cNvPr id="199" name="Подзаголовок слайда"/>
+          <p:cNvSpPr txBox="1"/>
+          <p:nvPr>
+            <p:ph type="body" sz="quarter" idx="1"/>
+          </p:nvPr>
+        </p:nvSpPr>
+        <p:spPr>
+          <a:xfrm>
+            <a:off x="1206500" y="2372961"/>
+            <a:ext cx="21971000" cy="934780"/>
+          </a:xfrm>
           <a:prstGeom prst="rect">
             <a:avLst/>
           </a:prstGeom>
@@ -6126,99 +6339,84 @@
           <a:lstStyle/>
           <a:p>
             <a:pPr/>
-            <a:r>
-              <a:t>Docker-образ</a:t>
-            </a:r>
-          </a:p>
-        </p:txBody>
-      </p:sp>
-      <p:sp>
-        <p:nvSpPr>
-          <p:cNvPr id="200" name="Подзаголовок слайда"/>
+          </a:p>
+        </p:txBody>
+      </p:sp>
+      <p:sp>
+        <p:nvSpPr>
+          <p:cNvPr id="200" name="Docker-образ - то, из чего будет создан контейнер. Это собранные вместо минимальная ОС, рантайм, приложение.…"/>
           <p:cNvSpPr txBox="1"/>
           <p:nvPr>
             <p:ph type="body" idx="21"/>
           </p:nvPr>
         </p:nvSpPr>
         <p:spPr>
-          <a:prstGeom prst="rect">
-            <a:avLst/>
-          </a:prstGeom>
+          <a:xfrm>
+            <a:off x="1206500" y="4248503"/>
+            <a:ext cx="21971000" cy="8256014"/>
+          </a:xfrm>
+          <a:prstGeom prst="rect">
+            <a:avLst/>
+          </a:prstGeom>
+          <a:extLst>
+            <a:ext uri="{C572A759-6A51-4108-AA02-DFA0A04FC94B}">
+              <ma14:wrappingTextBoxFlag xmlns:ma14="http://schemas.microsoft.com/office/mac/drawingml/2011/main" val="1"/>
+            </a:ext>
+          </a:extLst>
         </p:spPr>
         <p:txBody>
           <a:bodyPr/>
           <a:lstStyle/>
           <a:p>
-            <a:pPr/>
-          </a:p>
-        </p:txBody>
-      </p:sp>
-      <p:sp>
-        <p:nvSpPr>
-          <p:cNvPr id="201" name="Docker-образ - то, из чего будет создан контейнер. Это собранные вместо минимальная ОС, рантайм, приложение.…"/>
-          <p:cNvSpPr txBox="1"/>
-          <p:nvPr>
-            <p:ph type="body" idx="1"/>
-          </p:nvPr>
-        </p:nvSpPr>
-        <p:spPr>
-          <a:prstGeom prst="rect">
-            <a:avLst/>
-          </a:prstGeom>
-        </p:spPr>
-        <p:txBody>
-          <a:bodyPr/>
-          <a:lstStyle/>
-          <a:p>
-            <a:pPr marL="603504" indent="-603504" defTabSz="2413955">
+            <a:pPr marL="603504" indent="-603504" defTabSz="2413954">
               <a:spcBef>
                 <a:spcPts val="4400"/>
               </a:spcBef>
-              <a:defRPr sz="4752"/>
+              <a:defRPr sz="4700"/>
             </a:pPr>
             <a:r>
               <a:t>Docker-образ - то, из чего будет создан контейнер. Это собранные вместо минимальная ОС, рантайм, приложение.</a:t>
             </a:r>
           </a:p>
           <a:p>
-            <a:pPr marL="603504" indent="-603504" defTabSz="2413955">
+            <a:pPr marL="603504" indent="-603504" defTabSz="2413954">
               <a:spcBef>
                 <a:spcPts val="4400"/>
               </a:spcBef>
-              <a:defRPr sz="4752"/>
+              <a:defRPr sz="4700"/>
             </a:pPr>
             <a:r>
               <a:t>Docker-образ описывается с помощью Dockerfile - файл с командами по сборке образа.</a:t>
             </a:r>
           </a:p>
           <a:p>
-            <a:pPr marL="603504" indent="-603504" defTabSz="2413955">
+            <a:pPr marL="603504" indent="-603504" defTabSz="2413954">
               <a:spcBef>
                 <a:spcPts val="4400"/>
               </a:spcBef>
-              <a:defRPr sz="4752"/>
+              <a:defRPr sz="4700"/>
             </a:pPr>
             <a:r>
               <a:t>Docker-образ состоит из слоёв. Слой - команда, результат выполнения которой можно переиспользовать.</a:t>
             </a:r>
           </a:p>
           <a:p>
-            <a:pPr marL="603504" indent="-603504" defTabSz="2413955">
+            <a:pPr marL="603504" indent="-603504" defTabSz="2413954">
               <a:spcBef>
                 <a:spcPts val="4400"/>
               </a:spcBef>
-              <a:defRPr sz="4752"/>
+              <a:defRPr sz="4700"/>
             </a:pPr>
             <a:r>
               <a:t>Не всякая команда может создавать слой. Таких четыре: FROM, RUN, COPY, ADD.</a:t>
             </a:r>
           </a:p>
           <a:p>
-            <a:pPr marL="603504" indent="-603504" defTabSz="2413955">
+            <a:pPr marL="603504" indent="-603504" defTabSz="2413954">
               <a:spcBef>
                 <a:spcPts val="4400"/>
               </a:spcBef>
-              <a:defRPr sz="4752"/>
+              <a:defRPr sz="4700"/>
             </a:pPr>
             <a:r>
               <a:t>Всего команд для сборки образа 18.</a:t>
@@ -6254,7 +6452,7 @@
       </p:grpSpPr>
       <p:sp>
         <p:nvSpPr>
-          <p:cNvPr id="203" name="Заголовок слайда"/>
+          <p:cNvPr id="202" name="Заголовок слайда"/>
           <p:cNvSpPr txBox="1"/>
           <p:nvPr>
             <p:ph type="title"/>
@@ -6275,13 +6473,17 @@
       </p:sp>
       <p:sp>
         <p:nvSpPr>
-          <p:cNvPr id="204" name="Подзаголовок слайда"/>
-          <p:cNvSpPr txBox="1"/>
-          <p:nvPr>
-            <p:ph type="body" idx="21"/>
-          </p:nvPr>
-        </p:nvSpPr>
-        <p:spPr>
+          <p:cNvPr id="203" name="Подзаголовок слайда"/>
+          <p:cNvSpPr txBox="1"/>
+          <p:nvPr>
+            <p:ph type="body" sz="quarter" idx="1"/>
+          </p:nvPr>
+        </p:nvSpPr>
+        <p:spPr>
+          <a:xfrm>
+            <a:off x="1206500" y="2372961"/>
+            <a:ext cx="21971000" cy="934780"/>
+          </a:xfrm>
           <a:prstGeom prst="rect">
             <a:avLst/>
           </a:prstGeom>
@@ -6296,13 +6498,17 @@
       </p:sp>
       <p:sp>
         <p:nvSpPr>
-          <p:cNvPr id="205" name="Текст пункта на слайде"/>
-          <p:cNvSpPr txBox="1"/>
-          <p:nvPr>
-            <p:ph type="body" idx="1"/>
-          </p:nvPr>
-        </p:nvSpPr>
-        <p:spPr>
+          <p:cNvPr id="204" name="Текст пункта на слайде"/>
+          <p:cNvSpPr txBox="1"/>
+          <p:nvPr>
+            <p:ph type="body" idx="21"/>
+          </p:nvPr>
+        </p:nvSpPr>
+        <p:spPr>
+          <a:xfrm>
+            <a:off x="1206500" y="4248503"/>
+            <a:ext cx="21971000" cy="8256014"/>
+          </a:xfrm>
           <a:prstGeom prst="rect">
             <a:avLst/>
           </a:prstGeom>
@@ -6317,7 +6523,7 @@
       </p:sp>
       <p:pic>
         <p:nvPicPr>
-          <p:cNvPr id="206" name="Изображение" descr="Изображение"/>
+          <p:cNvPr id="205" name="Изображение" descr="Изображение"/>
           <p:cNvPicPr>
             <a:picLocks noChangeAspect="1"/>
           </p:cNvPicPr>
@@ -6334,7 +6540,7 @@
         <p:spPr>
           <a:xfrm>
             <a:off x="0" y="2345774"/>
-            <a:ext cx="24384001" cy="9640569"/>
+            <a:ext cx="24384002" cy="9640569"/>
           </a:xfrm>
           <a:prstGeom prst="rect">
             <a:avLst/>
@@ -6372,7 +6578,7 @@
       </p:grpSpPr>
       <p:sp>
         <p:nvSpPr>
-          <p:cNvPr id="208" name="Заголовок слайда"/>
+          <p:cNvPr id="207" name="Заголовок слайда"/>
           <p:cNvSpPr txBox="1"/>
           <p:nvPr>
             <p:ph type="title"/>
@@ -6393,13 +6599,17 @@
       </p:sp>
       <p:sp>
         <p:nvSpPr>
-          <p:cNvPr id="209" name="Подзаголовок слайда"/>
-          <p:cNvSpPr txBox="1"/>
-          <p:nvPr>
-            <p:ph type="body" idx="21"/>
-          </p:nvPr>
-        </p:nvSpPr>
-        <p:spPr>
+          <p:cNvPr id="208" name="Подзаголовок слайда"/>
+          <p:cNvSpPr txBox="1"/>
+          <p:nvPr>
+            <p:ph type="body" sz="quarter" idx="1"/>
+          </p:nvPr>
+        </p:nvSpPr>
+        <p:spPr>
+          <a:xfrm>
+            <a:off x="1206500" y="2372961"/>
+            <a:ext cx="21971000" cy="934780"/>
+          </a:xfrm>
           <a:prstGeom prst="rect">
             <a:avLst/>
           </a:prstGeom>
@@ -6414,16 +6624,25 @@
       </p:sp>
       <p:sp>
         <p:nvSpPr>
-          <p:cNvPr id="210" name="У образа может быть базовый образ, с которого начинается сборка (задаётся командой FROM).…"/>
-          <p:cNvSpPr txBox="1"/>
-          <p:nvPr>
-            <p:ph type="body" idx="1"/>
-          </p:nvPr>
-        </p:nvSpPr>
-        <p:spPr>
-          <a:prstGeom prst="rect">
-            <a:avLst/>
-          </a:prstGeom>
+          <p:cNvPr id="209" name="У образа может быть базовый образ, с которого начинается сборка (задаётся командой FROM).…"/>
+          <p:cNvSpPr txBox="1"/>
+          <p:nvPr>
+            <p:ph type="body" idx="21"/>
+          </p:nvPr>
+        </p:nvSpPr>
+        <p:spPr>
+          <a:xfrm>
+            <a:off x="1206500" y="4248503"/>
+            <a:ext cx="21971000" cy="8256014"/>
+          </a:xfrm>
+          <a:prstGeom prst="rect">
+            <a:avLst/>
+          </a:prstGeom>
+          <a:extLst>
+            <a:ext uri="{C572A759-6A51-4108-AA02-DFA0A04FC94B}">
+              <ma14:wrappingTextBoxFlag xmlns:ma14="http://schemas.microsoft.com/office/mac/drawingml/2011/main" val="1"/>
+            </a:ext>
+          </a:extLst>
         </p:spPr>
         <p:txBody>
           <a:bodyPr/>
@@ -6474,10 +6693,10 @@
         <a:srgbClr val="FFFFFF"/>
       </a:lt1>
       <a:dk2>
-        <a:srgbClr val="5E5E5E"/>
+        <a:srgbClr val="A7A7A7"/>
       </a:dk2>
       <a:lt2>
-        <a:srgbClr val="D5D5D5"/>
+        <a:srgbClr val="535353"/>
       </a:lt2>
       <a:accent1>
         <a:srgbClr val="00A2FF"/>
@@ -6511,9 +6730,9 @@
         <a:cs typeface="Helvetica Neue"/>
       </a:majorFont>
       <a:minorFont>
-        <a:latin typeface="Helvetica Neue"/>
-        <a:ea typeface="Helvetica Neue"/>
-        <a:cs typeface="Helvetica Neue"/>
+        <a:latin typeface="Helvetica"/>
+        <a:ea typeface="Helvetica"/>
+        <a:cs typeface="Helvetica"/>
       </a:minorFont>
     </a:fontScheme>
     <a:fmtScheme name="21_BasicWhite">
@@ -6654,11 +6873,14 @@
     <a:spDef>
       <a:spPr>
         <a:solidFill>
-          <a:srgbClr val="000000"/>
+          <a:srgbClr val="FFFFFF"/>
         </a:solidFill>
-        <a:ln w="12700" cap="flat">
-          <a:noFill/>
-          <a:miter lim="400000"/>
+        <a:ln w="25400" cap="flat">
+          <a:solidFill>
+            <a:schemeClr val="accent1"/>
+          </a:solidFill>
+          <a:prstDash val="solid"/>
+          <a:round/>
         </a:ln>
         <a:effectLst/>
         <a:sp3d/>
@@ -6667,12 +6889,12 @@
         <a:spAutoFit/>
       </a:bodyPr>
       <a:lstStyle>
-        <a:defPPr marL="0" marR="0" indent="0" algn="ctr" defTabSz="825500" rtl="0" fontAlgn="auto" latinLnBrk="0" hangingPunct="0">
+        <a:defPPr marL="0" marR="0" indent="0" algn="l" defTabSz="2438337" rtl="0" fontAlgn="auto" latinLnBrk="0" hangingPunct="0">
           <a:lnSpc>
-            <a:spcPct val="100000"/>
+            <a:spcPct val="90000"/>
           </a:lnSpc>
           <a:spcBef>
-            <a:spcPts val="0"/>
+            <a:spcPts val="4500"/>
           </a:spcBef>
           <a:spcAft>
             <a:spcPts val="0"/>
@@ -6682,19 +6904,19 @@
           <a:buFontTx/>
           <a:buNone/>
           <a:tabLst/>
-          <a:defRPr b="0" baseline="0" cap="none" i="0" spc="0" strike="noStrike" sz="3200" u="none" kumimoji="0" normalizeH="0">
+          <a:defRPr b="0" baseline="0" cap="none" i="0" spc="0" strike="noStrike" sz="4800" u="none" kumimoji="0" normalizeH="0">
             <a:ln>
               <a:noFill/>
             </a:ln>
             <a:solidFill>
-              <a:srgbClr val="FFFFFF"/>
+              <a:srgbClr val="000000"/>
             </a:solidFill>
             <a:effectLst/>
             <a:uFillTx/>
-            <a:latin typeface="Helvetica Neue Medium"/>
-            <a:ea typeface="Helvetica Neue Medium"/>
-            <a:cs typeface="Helvetica Neue Medium"/>
-            <a:sym typeface="Helvetica Neue Medium"/>
+            <a:latin typeface="+mj-lt"/>
+            <a:ea typeface="+mj-ea"/>
+            <a:cs typeface="+mj-cs"/>
+            <a:sym typeface="Helvetica Neue"/>
           </a:defRPr>
         </a:defPPr>
         <a:lvl1pPr marL="0" marR="0" indent="0" algn="l" defTabSz="914400" rtl="0" fontAlgn="auto" latinLnBrk="1" hangingPunct="0">
@@ -6944,10 +7166,10 @@
         <a:noFill/>
         <a:ln w="25400" cap="flat">
           <a:solidFill>
-            <a:srgbClr val="000000"/>
+            <a:schemeClr val="accent1"/>
           </a:solidFill>
           <a:prstDash val="solid"/>
-          <a:miter lim="400000"/>
+          <a:round/>
         </a:ln>
         <a:effectLst/>
         <a:sp3d/>
@@ -7238,7 +7460,7 @@
         <a:spAutoFit/>
       </a:bodyPr>
       <a:lstStyle>
-        <a:defPPr marL="0" marR="0" indent="0" algn="l" defTabSz="2438338" rtl="0" fontAlgn="auto" latinLnBrk="0" hangingPunct="0">
+        <a:defPPr marL="0" marR="0" indent="0" algn="l" defTabSz="2438337" rtl="0" fontAlgn="auto" latinLnBrk="0" hangingPunct="0">
           <a:lnSpc>
             <a:spcPct val="90000"/>
           </a:lnSpc>
@@ -7262,9 +7484,9 @@
             </a:solidFill>
             <a:effectLst/>
             <a:uFillTx/>
-            <a:latin typeface="+mn-lt"/>
-            <a:ea typeface="+mn-ea"/>
-            <a:cs typeface="+mn-cs"/>
+            <a:latin typeface="+mj-lt"/>
+            <a:ea typeface="+mj-ea"/>
+            <a:cs typeface="+mj-cs"/>
             <a:sym typeface="Helvetica Neue"/>
           </a:defRPr>
         </a:defPPr>
@@ -7525,10 +7747,10 @@
         <a:srgbClr val="FFFFFF"/>
       </a:lt1>
       <a:dk2>
-        <a:srgbClr val="5E5E5E"/>
+        <a:srgbClr val="A7A7A7"/>
       </a:dk2>
       <a:lt2>
-        <a:srgbClr val="D5D5D5"/>
+        <a:srgbClr val="535353"/>
       </a:lt2>
       <a:accent1>
         <a:srgbClr val="00A2FF"/>
@@ -7562,9 +7784,9 @@
         <a:cs typeface="Helvetica Neue"/>
       </a:majorFont>
       <a:minorFont>
-        <a:latin typeface="Helvetica Neue"/>
-        <a:ea typeface="Helvetica Neue"/>
-        <a:cs typeface="Helvetica Neue"/>
+        <a:latin typeface="Helvetica"/>
+        <a:ea typeface="Helvetica"/>
+        <a:cs typeface="Helvetica"/>
       </a:minorFont>
     </a:fontScheme>
     <a:fmtScheme name="21_BasicWhite">
@@ -7705,11 +7927,14 @@
     <a:spDef>
       <a:spPr>
         <a:solidFill>
-          <a:srgbClr val="000000"/>
+          <a:srgbClr val="FFFFFF"/>
         </a:solidFill>
-        <a:ln w="12700" cap="flat">
-          <a:noFill/>
-          <a:miter lim="400000"/>
+        <a:ln w="25400" cap="flat">
+          <a:solidFill>
+            <a:schemeClr val="accent1"/>
+          </a:solidFill>
+          <a:prstDash val="solid"/>
+          <a:round/>
         </a:ln>
         <a:effectLst/>
         <a:sp3d/>
@@ -7718,12 +7943,12 @@
         <a:spAutoFit/>
       </a:bodyPr>
       <a:lstStyle>
-        <a:defPPr marL="0" marR="0" indent="0" algn="ctr" defTabSz="825500" rtl="0" fontAlgn="auto" latinLnBrk="0" hangingPunct="0">
+        <a:defPPr marL="0" marR="0" indent="0" algn="l" defTabSz="2438337" rtl="0" fontAlgn="auto" latinLnBrk="0" hangingPunct="0">
           <a:lnSpc>
-            <a:spcPct val="100000"/>
+            <a:spcPct val="90000"/>
           </a:lnSpc>
           <a:spcBef>
-            <a:spcPts val="0"/>
+            <a:spcPts val="4500"/>
           </a:spcBef>
           <a:spcAft>
             <a:spcPts val="0"/>
@@ -7733,19 +7958,19 @@
           <a:buFontTx/>
           <a:buNone/>
           <a:tabLst/>
-          <a:defRPr b="0" baseline="0" cap="none" i="0" spc="0" strike="noStrike" sz="3200" u="none" kumimoji="0" normalizeH="0">
+          <a:defRPr b="0" baseline="0" cap="none" i="0" spc="0" strike="noStrike" sz="4800" u="none" kumimoji="0" normalizeH="0">
             <a:ln>
               <a:noFill/>
             </a:ln>
             <a:solidFill>
-              <a:srgbClr val="FFFFFF"/>
+              <a:srgbClr val="000000"/>
             </a:solidFill>
             <a:effectLst/>
             <a:uFillTx/>
-            <a:latin typeface="Helvetica Neue Medium"/>
-            <a:ea typeface="Helvetica Neue Medium"/>
-            <a:cs typeface="Helvetica Neue Medium"/>
-            <a:sym typeface="Helvetica Neue Medium"/>
+            <a:latin typeface="+mj-lt"/>
+            <a:ea typeface="+mj-ea"/>
+            <a:cs typeface="+mj-cs"/>
+            <a:sym typeface="Helvetica Neue"/>
           </a:defRPr>
         </a:defPPr>
         <a:lvl1pPr marL="0" marR="0" indent="0" algn="l" defTabSz="914400" rtl="0" fontAlgn="auto" latinLnBrk="1" hangingPunct="0">
@@ -7995,10 +8220,10 @@
         <a:noFill/>
         <a:ln w="25400" cap="flat">
           <a:solidFill>
-            <a:srgbClr val="000000"/>
+            <a:schemeClr val="accent1"/>
           </a:solidFill>
           <a:prstDash val="solid"/>
-          <a:miter lim="400000"/>
+          <a:round/>
         </a:ln>
         <a:effectLst/>
         <a:sp3d/>
@@ -8289,7 +8514,7 @@
         <a:spAutoFit/>
       </a:bodyPr>
       <a:lstStyle>
-        <a:defPPr marL="0" marR="0" indent="0" algn="l" defTabSz="2438338" rtl="0" fontAlgn="auto" latinLnBrk="0" hangingPunct="0">
+        <a:defPPr marL="0" marR="0" indent="0" algn="l" defTabSz="2438337" rtl="0" fontAlgn="auto" latinLnBrk="0" hangingPunct="0">
           <a:lnSpc>
             <a:spcPct val="90000"/>
           </a:lnSpc>
@@ -8313,9 +8538,9 @@
             </a:solidFill>
             <a:effectLst/>
             <a:uFillTx/>
-            <a:latin typeface="+mn-lt"/>
-            <a:ea typeface="+mn-ea"/>
-            <a:cs typeface="+mn-cs"/>
+            <a:latin typeface="+mj-lt"/>
+            <a:ea typeface="+mj-ea"/>
+            <a:cs typeface="+mj-cs"/>
             <a:sym typeface="Helvetica Neue"/>
           </a:defRPr>
         </a:defPPr>
